--- a/apps/playground/src/assets/samples/presentation.pptx
+++ b/apps/playground/src/assets/samples/presentation.pptx
@@ -10,9 +10,17 @@
   <p:sldIdLst>
     <p:sldId id="256" r:id="rId4"/>
     <p:sldId id="257" r:id="rId5"/>
+    <p:sldId id="258" r:id="rId6"/>
+    <p:sldId id="259" r:id="rId7"/>
+    <p:sldId id="260" r:id="rId8"/>
+    <p:sldId id="261" r:id="rId9"/>
+    <p:sldId id="262" r:id="rId10"/>
+    <p:sldId id="263" r:id="rId11"/>
+    <p:sldId id="264" r:id="rId12"/>
+    <p:sldId id="265" r:id="rId13"/>
   </p:sldIdLst>
   <p:sldSz cx="10080625" cy="5670550"/>
-  <p:notesSz cx="7559675" cy="10691813"/>
+  <p:notesSz cx="7772400" cy="10058400"/>
 </p:presentation>
 </file>
 
@@ -35,7 +43,7 @@
       </p:grpSpPr>
       <p:sp>
         <p:nvSpPr>
-          <p:cNvPr id="7" name="PlaceHolder 1"/>
+          <p:cNvPr id="9" name="PlaceHolder 1"/>
           <p:cNvSpPr>
             <a:spLocks noGrp="1"/>
           </p:cNvSpPr>
@@ -45,8 +53,8 @@
         </p:nvSpPr>
         <p:spPr>
           <a:xfrm>
-            <a:off x="216000" y="812520"/>
-            <a:ext cx="7127280" cy="4008960"/>
+            <a:off x="533520" y="764280"/>
+            <a:ext cx="6704640" cy="3771360"/>
           </a:xfrm>
           <a:prstGeom prst="rect">
             <a:avLst/>
@@ -57,13 +65,13 @@
           </a:ln>
         </p:spPr>
         <p:txBody>
-          <a:bodyPr lIns="0" rIns="0" tIns="0" bIns="0" anchor="ctr">
+          <a:bodyPr lIns="0" tIns="0" rIns="0" bIns="0" anchor="ctr">
             <a:noAutofit/>
           </a:bodyPr>
           <a:p>
             <a:pPr algn="ctr"/>
             <a:r>
-              <a:rPr b="0" lang="en-GB" sz="4400" strike="noStrike" u="none">
+              <a:rPr lang="en-US" sz="4400" b="0" u="none" strike="noStrike">
                 <a:solidFill>
                   <a:srgbClr val="000000"/>
                 </a:solidFill>
@@ -73,7 +81,7 @@
               </a:rPr>
               <a:t>Click to move the slide</a:t>
             </a:r>
-            <a:endParaRPr b="0" lang="en-GB" sz="4400" strike="noStrike" u="none">
+            <a:endParaRPr lang="en-US" sz="4400" b="0" u="none" strike="noStrike">
               <a:solidFill>
                 <a:srgbClr val="000000"/>
               </a:solidFill>
@@ -86,7 +94,7 @@
       </p:sp>
       <p:sp>
         <p:nvSpPr>
-          <p:cNvPr id="8" name="PlaceHolder 2"/>
+          <p:cNvPr id="10" name="PlaceHolder 2"/>
           <p:cNvSpPr>
             <a:spLocks noGrp="1"/>
           </p:cNvSpPr>
@@ -96,8 +104,8 @@
         </p:nvSpPr>
         <p:spPr>
           <a:xfrm>
-            <a:off x="756000" y="5078520"/>
-            <a:ext cx="6047640" cy="4811040"/>
+            <a:off x="777240" y="4777560"/>
+            <a:ext cx="6217560" cy="4525920"/>
           </a:xfrm>
           <a:prstGeom prst="rect">
             <a:avLst/>
@@ -108,15 +116,15 @@
           </a:ln>
         </p:spPr>
         <p:txBody>
-          <a:bodyPr lIns="0" rIns="0" tIns="0" bIns="0" anchor="t">
+          <a:bodyPr lIns="0" tIns="0" rIns="0" bIns="0" anchor="t">
             <a:noAutofit/>
           </a:bodyPr>
           <a:p>
-            <a:pPr indent="0">
+            <a:pPr indent="0" algn="l">
               <a:buNone/>
             </a:pPr>
             <a:r>
-              <a:rPr b="0" lang="en-GB" sz="2000" strike="noStrike" u="none">
+              <a:rPr lang="en-US" sz="2000" b="0" u="none" strike="noStrike">
                 <a:solidFill>
                   <a:srgbClr val="000000"/>
                 </a:solidFill>
@@ -124,9 +132,9 @@
                 <a:uFillTx/>
                 <a:latin typeface="Arial"/>
               </a:rPr>
-              <a:t>Click to edit the notes' format</a:t>
-            </a:r>
-            <a:endParaRPr b="0" lang="en-GB" sz="2000" strike="noStrike" u="none">
+              <a:t>Click to edit the notes format</a:t>
+            </a:r>
+            <a:endParaRPr lang="en-US" sz="2000" b="0" u="none" strike="noStrike">
               <a:solidFill>
                 <a:srgbClr val="000000"/>
               </a:solidFill>
@@ -139,7 +147,7 @@
       </p:sp>
       <p:sp>
         <p:nvSpPr>
-          <p:cNvPr id="9" name="PlaceHolder 3"/>
+          <p:cNvPr id="11" name="PlaceHolder 3"/>
           <p:cNvSpPr>
             <a:spLocks noGrp="1"/>
           </p:cNvSpPr>
@@ -150,7 +158,7 @@
         <p:spPr>
           <a:xfrm>
             <a:off x="0" y="0"/>
-            <a:ext cx="3280680" cy="534240"/>
+            <a:ext cx="3372840" cy="502560"/>
           </a:xfrm>
           <a:prstGeom prst="rect">
             <a:avLst/>
@@ -161,15 +169,15 @@
           </a:ln>
         </p:spPr>
         <p:txBody>
-          <a:bodyPr lIns="0" rIns="0" tIns="0" bIns="0" anchor="t">
+          <a:bodyPr lIns="0" tIns="0" rIns="0" bIns="0" anchor="t">
             <a:noAutofit/>
           </a:bodyPr>
           <a:p>
-            <a:pPr indent="0">
+            <a:pPr indent="0" algn="l">
               <a:buNone/>
             </a:pPr>
             <a:r>
-              <a:rPr b="0" lang="en-GB" sz="1400" strike="noStrike" u="none">
+              <a:rPr lang="en-US" sz="1400" b="0" u="none" strike="noStrike">
                 <a:solidFill>
                   <a:srgbClr val="000000"/>
                 </a:solidFill>
@@ -179,7 +187,7 @@
               </a:rPr>
               <a:t>&lt;header&gt;</a:t>
             </a:r>
-            <a:endParaRPr b="0" lang="en-GB" sz="1400" strike="noStrike" u="none">
+            <a:endParaRPr lang="en-US" sz="1400" b="0" u="none" strike="noStrike">
               <a:solidFill>
                 <a:srgbClr val="000000"/>
               </a:solidFill>
@@ -192,7 +200,7 @@
       </p:sp>
       <p:sp>
         <p:nvSpPr>
-          <p:cNvPr id="10" name="PlaceHolder 4"/>
+          <p:cNvPr id="12" name="PlaceHolder 4"/>
           <p:cNvSpPr>
             <a:spLocks noGrp="1"/>
           </p:cNvSpPr>
@@ -202,8 +210,8 @@
         </p:nvSpPr>
         <p:spPr>
           <a:xfrm>
-            <a:off x="4278960" y="0"/>
-            <a:ext cx="3280680" cy="534240"/>
+            <a:off x="4399200" y="0"/>
+            <a:ext cx="3372840" cy="502560"/>
           </a:xfrm>
           <a:prstGeom prst="rect">
             <a:avLst/>
@@ -214,13 +222,13 @@
           </a:ln>
         </p:spPr>
         <p:txBody>
-          <a:bodyPr lIns="0" rIns="0" tIns="0" bIns="0" anchor="t">
+          <a:bodyPr lIns="0" tIns="0" rIns="0" bIns="0" anchor="t">
             <a:noAutofit/>
           </a:bodyPr>
           <a:lstStyle>
             <a:lvl1pPr indent="0" algn="r">
               <a:buNone/>
-              <a:defRPr b="0" lang="en-GB" sz="1400" strike="noStrike" u="none">
+              <a:defRPr lang="en-US" sz="1400" b="0" u="none" strike="noStrike">
                 <a:solidFill>
                   <a:srgbClr val="000000"/>
                 </a:solidFill>
@@ -235,7 +243,7 @@
               <a:buNone/>
             </a:pPr>
             <a:r>
-              <a:rPr b="0" lang="en-GB" sz="1400" strike="noStrike" u="none">
+              <a:rPr lang="en-US" sz="1400" b="0" u="none" strike="noStrike">
                 <a:solidFill>
                   <a:srgbClr val="000000"/>
                 </a:solidFill>
@@ -245,7 +253,7 @@
               </a:rPr>
               <a:t>&lt;date/time&gt;</a:t>
             </a:r>
-            <a:endParaRPr b="0" lang="en-GB" sz="1400" strike="noStrike" u="none">
+            <a:endParaRPr lang="en-US" sz="1400" b="0" u="none" strike="noStrike">
               <a:solidFill>
                 <a:srgbClr val="000000"/>
               </a:solidFill>
@@ -258,7 +266,7 @@
       </p:sp>
       <p:sp>
         <p:nvSpPr>
-          <p:cNvPr id="11" name="PlaceHolder 5"/>
+          <p:cNvPr id="13" name="PlaceHolder 5"/>
           <p:cNvSpPr>
             <a:spLocks noGrp="1"/>
           </p:cNvSpPr>
@@ -268,8 +276,8 @@
         </p:nvSpPr>
         <p:spPr>
           <a:xfrm>
-            <a:off x="0" y="10157400"/>
-            <a:ext cx="3280680" cy="534240"/>
+            <a:off x="0" y="9555480"/>
+            <a:ext cx="3372840" cy="502560"/>
           </a:xfrm>
           <a:prstGeom prst="rect">
             <a:avLst/>
@@ -280,13 +288,13 @@
           </a:ln>
         </p:spPr>
         <p:txBody>
-          <a:bodyPr lIns="0" rIns="0" tIns="0" bIns="0" anchor="b">
+          <a:bodyPr lIns="0" tIns="0" rIns="0" bIns="0" anchor="b">
             <a:noAutofit/>
           </a:bodyPr>
           <a:lstStyle>
-            <a:lvl1pPr indent="0">
+            <a:lvl1pPr indent="0" algn="l">
               <a:buNone/>
-              <a:defRPr b="0" lang="en-GB" sz="1400" strike="noStrike" u="none">
+              <a:defRPr lang="en-US" sz="1400" b="0" u="none" strike="noStrike">
                 <a:solidFill>
                   <a:srgbClr val="000000"/>
                 </a:solidFill>
@@ -297,11 +305,11 @@
             </a:lvl1pPr>
           </a:lstStyle>
           <a:p>
-            <a:pPr indent="0">
+            <a:pPr indent="0" algn="l">
               <a:buNone/>
             </a:pPr>
             <a:r>
-              <a:rPr b="0" lang="en-GB" sz="1400" strike="noStrike" u="none">
+              <a:rPr lang="en-US" sz="1400" b="0" u="none" strike="noStrike">
                 <a:solidFill>
                   <a:srgbClr val="000000"/>
                 </a:solidFill>
@@ -311,7 +319,7 @@
               </a:rPr>
               <a:t>&lt;footer&gt;</a:t>
             </a:r>
-            <a:endParaRPr b="0" lang="en-GB" sz="1400" strike="noStrike" u="none">
+            <a:endParaRPr lang="en-US" sz="1400" b="0" u="none" strike="noStrike">
               <a:solidFill>
                 <a:srgbClr val="000000"/>
               </a:solidFill>
@@ -324,7 +332,7 @@
       </p:sp>
       <p:sp>
         <p:nvSpPr>
-          <p:cNvPr id="12" name="PlaceHolder 6"/>
+          <p:cNvPr id="14" name="PlaceHolder 6"/>
           <p:cNvSpPr>
             <a:spLocks noGrp="1"/>
           </p:cNvSpPr>
@@ -334,8 +342,8 @@
         </p:nvSpPr>
         <p:spPr>
           <a:xfrm>
-            <a:off x="4278960" y="10157400"/>
-            <a:ext cx="3280680" cy="534240"/>
+            <a:off x="4399200" y="9555480"/>
+            <a:ext cx="3372840" cy="502560"/>
           </a:xfrm>
           <a:prstGeom prst="rect">
             <a:avLst/>
@@ -346,13 +354,13 @@
           </a:ln>
         </p:spPr>
         <p:txBody>
-          <a:bodyPr lIns="0" rIns="0" tIns="0" bIns="0" anchor="b">
+          <a:bodyPr lIns="0" tIns="0" rIns="0" bIns="0" anchor="b">
             <a:noAutofit/>
           </a:bodyPr>
           <a:lstStyle>
             <a:lvl1pPr indent="0" algn="r">
               <a:buNone/>
-              <a:defRPr b="0" lang="en-GB" sz="1400" strike="noStrike" u="none">
+              <a:defRPr lang="en-US" sz="1400" b="0" u="none" strike="noStrike">
                 <a:solidFill>
                   <a:srgbClr val="000000"/>
                 </a:solidFill>
@@ -366,8 +374,8 @@
             <a:pPr indent="0" algn="r">
               <a:buNone/>
             </a:pPr>
-            <a:fld id="{BC635711-C7EB-47F0-9497-7EC21F497CF0}" type="slidenum">
-              <a:rPr b="0" lang="en-GB" sz="1400" strike="noStrike" u="none">
+            <a:fld id="{2DC3A6A0-8ECD-438F-9CD6-6F4F3F27546A}" type="slidenum">
+              <a:rPr lang="en-US" sz="1400" b="0" u="none" strike="noStrike">
                 <a:solidFill>
                   <a:srgbClr val="000000"/>
                 </a:solidFill>
@@ -377,7 +385,7 @@
               </a:rPr>
               <a:t>&lt;number&gt;</a:t>
             </a:fld>
-            <a:endParaRPr b="0" lang="en-GB" sz="1400" strike="noStrike" u="none">
+            <a:endParaRPr lang="en-US" sz="1400" b="0" u="none" strike="noStrike">
               <a:solidFill>
                 <a:srgbClr val="000000"/>
               </a:solidFill>
@@ -413,7 +421,7 @@
       </p:grpSpPr>
       <p:sp>
         <p:nvSpPr>
-          <p:cNvPr id="20" name=""/>
+          <p:cNvPr id="50" name=""/>
           <p:cNvSpPr txBox="1"/>
           <p:nvPr/>
         </p:nvSpPr>
@@ -426,23 +434,28 @@
             <a:avLst/>
           </a:prstGeom>
           <a:solidFill>
-            <a:srgbClr val="729fcf"/>
+            <a:schemeClr val="accent1"/>
           </a:solidFill>
-          <a:ln w="0">
+          <a:ln w="38160">
             <a:solidFill>
-              <a:srgbClr val="3465a4"/>
+              <a:schemeClr val="accent1">
+                <a:lumMod val="75000"/>
+                <a:lumOff val="0"/>
+              </a:schemeClr>
             </a:solidFill>
+            <a:round/>
           </a:ln>
         </p:spPr>
         <p:txBody>
-          <a:bodyPr lIns="90000" rIns="90000" tIns="45000" bIns="45000" anchor="t">
+          <a:bodyPr lIns="90000" tIns="45000" rIns="90000" bIns="45000" anchor="t">
             <a:spAutoFit/>
           </a:bodyPr>
           <a:p>
-            <a:r>
-              <a:rPr b="0" lang="en-GB" sz="1800" strike="noStrike" u="none">
-                <a:solidFill>
-                  <a:srgbClr val="000000"/>
+            <a:pPr/>
+            <a:r>
+              <a:rPr lang="en-US" sz="1800" b="0" u="none" strike="noStrike">
+                <a:solidFill>
+                  <a:srgbClr val="FFFFFF"/>
                 </a:solidFill>
                 <a:effectLst/>
                 <a:uFillTx/>
@@ -450,9 +463,86 @@
               </a:rPr>
               <a:t>Speaker note for the intro slide.</a:t>
             </a:r>
-            <a:endParaRPr b="0" lang="en-GB" sz="1800" strike="noStrike" u="none">
-              <a:solidFill>
-                <a:srgbClr val="000000"/>
+            <a:endParaRPr lang="en-US" sz="1800" b="0" u="none" strike="noStrike">
+              <a:solidFill>
+                <a:srgbClr val="FFFFFF"/>
+              </a:solidFill>
+              <a:effectLst/>
+              <a:uFillTx/>
+              <a:latin typeface="Arial"/>
+            </a:endParaRPr>
+          </a:p>
+        </p:txBody>
+      </p:sp>
+    </p:spTree>
+  </p:cSld>
+</p:notes>
+</file>
+
+<file path=ppt/notesSlides/notesSlide10.xml><?xml version="1.0" encoding="utf-8"?>
+<p:notes xmlns:a="http://schemas.openxmlformats.org/drawingml/2006/main" xmlns:p="http://schemas.openxmlformats.org/presentationml/2006/main" xmlns:r="http://schemas.openxmlformats.org/officeDocument/2006/relationships" xmlns:p14="http://schemas.microsoft.com/office/powerpoint/2010/main" xmlns:p15="http://schemas.microsoft.com/office/powerpoint/2012/main" xmlns:mc="http://schemas.openxmlformats.org/markup-compatibility/2006">
+  <p:cSld>
+    <p:spTree>
+      <p:nvGrpSpPr>
+        <p:cNvPr id="1" name=""/>
+        <p:cNvGrpSpPr/>
+        <p:nvPr/>
+      </p:nvGrpSpPr>
+      <p:grpSpPr>
+        <a:xfrm>
+          <a:off x="0" y="0"/>
+          <a:ext cx="0" cy="0"/>
+          <a:chOff x="0" y="0"/>
+          <a:chExt cx="0" cy="0"/>
+        </a:xfrm>
+      </p:grpSpPr>
+      <p:sp>
+        <p:nvSpPr>
+          <p:cNvPr id="59" name=""/>
+          <p:cNvSpPr txBox="1"/>
+          <p:nvPr/>
+        </p:nvSpPr>
+        <p:spPr>
+          <a:xfrm>
+            <a:off x="720000" y="360000"/>
+            <a:ext cx="5760000" cy="3600000"/>
+          </a:xfrm>
+          <a:prstGeom prst="rect">
+            <a:avLst/>
+          </a:prstGeom>
+          <a:solidFill>
+            <a:schemeClr val="accent1"/>
+          </a:solidFill>
+          <a:ln w="38160">
+            <a:solidFill>
+              <a:schemeClr val="accent1">
+                <a:lumMod val="75000"/>
+                <a:lumOff val="0"/>
+              </a:schemeClr>
+            </a:solidFill>
+            <a:round/>
+          </a:ln>
+        </p:spPr>
+        <p:txBody>
+          <a:bodyPr lIns="90000" tIns="45000" rIns="90000" bIns="45000" anchor="t">
+            <a:spAutoFit/>
+          </a:bodyPr>
+          <a:p>
+            <a:pPr/>
+            <a:r>
+              <a:rPr lang="en-US" sz="1800" b="0" u="none" strike="noStrike">
+                <a:solidFill>
+                  <a:srgbClr val="FFFFFF"/>
+                </a:solidFill>
+                <a:effectLst/>
+                <a:uFillTx/>
+                <a:latin typeface="Arial"/>
+              </a:rPr>
+              <a:t>Second slide notes mention the table.</a:t>
+            </a:r>
+            <a:endParaRPr lang="en-US" sz="1800" b="0" u="none" strike="noStrike">
+              <a:solidFill>
+                <a:srgbClr val="FFFFFF"/>
               </a:solidFill>
               <a:effectLst/>
               <a:uFillTx/>
@@ -485,7 +575,7 @@
       </p:grpSpPr>
       <p:sp>
         <p:nvSpPr>
-          <p:cNvPr id="21" name=""/>
+          <p:cNvPr id="51" name=""/>
           <p:cNvSpPr txBox="1"/>
           <p:nvPr/>
         </p:nvSpPr>
@@ -498,23 +588,28 @@
             <a:avLst/>
           </a:prstGeom>
           <a:solidFill>
-            <a:srgbClr val="729fcf"/>
+            <a:schemeClr val="accent1"/>
           </a:solidFill>
-          <a:ln w="0">
+          <a:ln w="38160">
             <a:solidFill>
-              <a:srgbClr val="3465a4"/>
+              <a:schemeClr val="accent1">
+                <a:lumMod val="75000"/>
+                <a:lumOff val="0"/>
+              </a:schemeClr>
             </a:solidFill>
+            <a:round/>
           </a:ln>
         </p:spPr>
         <p:txBody>
-          <a:bodyPr lIns="90000" rIns="90000" tIns="45000" bIns="45000" anchor="t">
+          <a:bodyPr lIns="90000" tIns="45000" rIns="90000" bIns="45000" anchor="t">
             <a:spAutoFit/>
           </a:bodyPr>
           <a:p>
-            <a:r>
-              <a:rPr b="0" lang="en-GB" sz="1800" strike="noStrike" u="none">
-                <a:solidFill>
-                  <a:srgbClr val="000000"/>
+            <a:pPr/>
+            <a:r>
+              <a:rPr lang="en-US" sz="1800" b="0" u="none" strike="noStrike">
+                <a:solidFill>
+                  <a:srgbClr val="FFFFFF"/>
                 </a:solidFill>
                 <a:effectLst/>
                 <a:uFillTx/>
@@ -522,9 +617,9 @@
               </a:rPr>
               <a:t>Second slide notes mention the table.</a:t>
             </a:r>
-            <a:endParaRPr b="0" lang="en-GB" sz="1800" strike="noStrike" u="none">
-              <a:solidFill>
-                <a:srgbClr val="000000"/>
+            <a:endParaRPr lang="en-US" sz="1800" b="0" u="none" strike="noStrike">
+              <a:solidFill>
+                <a:srgbClr val="FFFFFF"/>
               </a:solidFill>
               <a:effectLst/>
               <a:uFillTx/>
@@ -538,9 +633,9 @@
 </p:notes>
 </file>
 
-<file path=ppt/slideLayouts/slideLayout1.xml><?xml version="1.0" encoding="utf-8"?>
-<p:sldLayout xmlns:a="http://schemas.openxmlformats.org/drawingml/2006/main" xmlns:p="http://schemas.openxmlformats.org/presentationml/2006/main" xmlns:r="http://schemas.openxmlformats.org/officeDocument/2006/relationships" xmlns:p14="http://schemas.microsoft.com/office/powerpoint/2010/main" xmlns:p15="http://schemas.microsoft.com/office/powerpoint/2012/main" xmlns:mc="http://schemas.openxmlformats.org/markup-compatibility/2006" type="title" preserve="1">
-  <p:cSld name="Default">
+<file path=ppt/notesSlides/notesSlide3.xml><?xml version="1.0" encoding="utf-8"?>
+<p:notes xmlns:a="http://schemas.openxmlformats.org/drawingml/2006/main" xmlns:p="http://schemas.openxmlformats.org/presentationml/2006/main" xmlns:r="http://schemas.openxmlformats.org/officeDocument/2006/relationships" xmlns:p14="http://schemas.microsoft.com/office/powerpoint/2010/main" xmlns:p15="http://schemas.microsoft.com/office/powerpoint/2012/main" xmlns:mc="http://schemas.openxmlformats.org/markup-compatibility/2006">
+  <p:cSld>
     <p:spTree>
       <p:nvGrpSpPr>
         <p:cNvPr id="1" name=""/>
@@ -557,38 +652,51 @@
       </p:grpSpPr>
       <p:sp>
         <p:nvSpPr>
-          <p:cNvPr id="5" name="PlaceHolder 1"/>
-          <p:cNvSpPr>
-            <a:spLocks noGrp="1"/>
-          </p:cNvSpPr>
-          <p:nvPr>
-            <p:ph type="title"/>
-          </p:nvPr>
+          <p:cNvPr id="52" name=""/>
+          <p:cNvSpPr txBox="1"/>
+          <p:nvPr/>
         </p:nvSpPr>
         <p:spPr>
           <a:xfrm>
-            <a:off x="504000" y="226080"/>
-            <a:ext cx="9071640" cy="946440"/>
+            <a:off x="720000" y="360000"/>
+            <a:ext cx="5760000" cy="3600000"/>
           </a:xfrm>
           <a:prstGeom prst="rect">
             <a:avLst/>
           </a:prstGeom>
-          <a:noFill/>
-          <a:ln w="0">
-            <a:noFill/>
+          <a:solidFill>
+            <a:schemeClr val="accent1"/>
+          </a:solidFill>
+          <a:ln w="38160">
+            <a:solidFill>
+              <a:schemeClr val="accent1">
+                <a:lumMod val="75000"/>
+                <a:lumOff val="0"/>
+              </a:schemeClr>
+            </a:solidFill>
+            <a:round/>
           </a:ln>
         </p:spPr>
         <p:txBody>
-          <a:bodyPr lIns="0" rIns="0" tIns="0" bIns="0" anchor="ctr">
+          <a:bodyPr lIns="90000" tIns="45000" rIns="90000" bIns="45000" anchor="t">
             <a:spAutoFit/>
           </a:bodyPr>
           <a:p>
-            <a:pPr indent="0" algn="ctr">
-              <a:buNone/>
-            </a:pPr>
-            <a:endParaRPr b="0" lang="en-GB" sz="4400" strike="noStrike" u="none">
-              <a:solidFill>
-                <a:srgbClr val="ffffff"/>
+            <a:pPr/>
+            <a:r>
+              <a:rPr lang="en-US" sz="1800" b="0" u="none" strike="noStrike">
+                <a:solidFill>
+                  <a:srgbClr val="FFFFFF"/>
+                </a:solidFill>
+                <a:effectLst/>
+                <a:uFillTx/>
+                <a:latin typeface="Arial"/>
+              </a:rPr>
+              <a:t>Speaker note for the intro slide.</a:t>
+            </a:r>
+            <a:endParaRPr lang="en-US" sz="1800" b="0" u="none" strike="noStrike">
+              <a:solidFill>
+                <a:srgbClr val="FFFFFF"/>
               </a:solidFill>
               <a:effectLst/>
               <a:uFillTx/>
@@ -597,115 +705,474 @@
           </a:p>
         </p:txBody>
       </p:sp>
+    </p:spTree>
+  </p:cSld>
+</p:notes>
+</file>
+
+<file path=ppt/notesSlides/notesSlide4.xml><?xml version="1.0" encoding="utf-8"?>
+<p:notes xmlns:a="http://schemas.openxmlformats.org/drawingml/2006/main" xmlns:p="http://schemas.openxmlformats.org/presentationml/2006/main" xmlns:r="http://schemas.openxmlformats.org/officeDocument/2006/relationships" xmlns:p14="http://schemas.microsoft.com/office/powerpoint/2010/main" xmlns:p15="http://schemas.microsoft.com/office/powerpoint/2012/main" xmlns:mc="http://schemas.openxmlformats.org/markup-compatibility/2006">
+  <p:cSld>
+    <p:spTree>
+      <p:nvGrpSpPr>
+        <p:cNvPr id="1" name=""/>
+        <p:cNvGrpSpPr/>
+        <p:nvPr/>
+      </p:nvGrpSpPr>
+      <p:grpSpPr>
+        <a:xfrm>
+          <a:off x="0" y="0"/>
+          <a:ext cx="0" cy="0"/>
+          <a:chOff x="0" y="0"/>
+          <a:chExt cx="0" cy="0"/>
+        </a:xfrm>
+      </p:grpSpPr>
       <p:sp>
         <p:nvSpPr>
-          <p:cNvPr id="6" name="PlaceHolder 2"/>
-          <p:cNvSpPr>
-            <a:spLocks noGrp="1"/>
-          </p:cNvSpPr>
-          <p:nvPr>
-            <p:ph type="subTitle"/>
-          </p:nvPr>
+          <p:cNvPr id="53" name=""/>
+          <p:cNvSpPr txBox="1"/>
+          <p:nvPr/>
         </p:nvSpPr>
         <p:spPr>
           <a:xfrm>
-            <a:off x="504000" y="1326600"/>
-            <a:ext cx="9071640" cy="3288240"/>
+            <a:off x="720000" y="360000"/>
+            <a:ext cx="5760000" cy="3600000"/>
           </a:xfrm>
           <a:prstGeom prst="rect">
             <a:avLst/>
           </a:prstGeom>
-          <a:noFill/>
-          <a:ln w="0">
-            <a:noFill/>
+          <a:solidFill>
+            <a:schemeClr val="accent1"/>
+          </a:solidFill>
+          <a:ln w="38160">
+            <a:solidFill>
+              <a:schemeClr val="accent1">
+                <a:lumMod val="75000"/>
+                <a:lumOff val="0"/>
+              </a:schemeClr>
+            </a:solidFill>
+            <a:round/>
           </a:ln>
         </p:spPr>
         <p:txBody>
-          <a:bodyPr lIns="0" rIns="0" tIns="0" bIns="0" anchor="ctr">
+          <a:bodyPr lIns="90000" tIns="45000" rIns="90000" bIns="45000" anchor="t">
             <a:spAutoFit/>
           </a:bodyPr>
           <a:p>
-            <a:pPr indent="0" algn="ctr">
-              <a:buNone/>
-            </a:pPr>
-            <a:endParaRPr b="0" lang="en-GB" sz="3200" strike="noStrike" u="none">
-              <a:solidFill>
-                <a:srgbClr val="ffffff"/>
+            <a:pPr/>
+            <a:r>
+              <a:rPr lang="en-US" sz="1800" b="0" u="none" strike="noStrike">
+                <a:solidFill>
+                  <a:srgbClr val="FFFFFF"/>
+                </a:solidFill>
+                <a:effectLst/>
+                <a:uFillTx/>
+                <a:latin typeface="Arial"/>
+              </a:rPr>
+              <a:t>Second slide notes mention the table.</a:t>
+            </a:r>
+            <a:endParaRPr lang="en-US" sz="1800" b="0" u="none" strike="noStrike">
+              <a:solidFill>
+                <a:srgbClr val="FFFFFF"/>
               </a:solidFill>
               <a:effectLst/>
               <a:uFillTx/>
               <a:latin typeface="Arial"/>
             </a:endParaRPr>
-          </a:p>
-        </p:txBody>
-      </p:sp>
-      <p:sp>
-        <p:nvSpPr>
-          <p:cNvPr id="4" name="PlaceHolder 3"/>
-          <p:cNvSpPr>
-            <a:spLocks noGrp="1"/>
-          </p:cNvSpPr>
-          <p:nvPr>
-            <p:ph type="ftr" idx="2"/>
-          </p:nvPr>
-        </p:nvSpPr>
-        <p:spPr/>
-        <p:txBody>
-          <a:bodyPr/>
-          <a:p>
-            <a:r>
-              <a:t>Footer</a:t>
-            </a:r>
-          </a:p>
-        </p:txBody>
-      </p:sp>
-      <p:sp>
-        <p:nvSpPr>
-          <p:cNvPr id="5" name="PlaceHolder 4"/>
-          <p:cNvSpPr>
-            <a:spLocks noGrp="1"/>
-          </p:cNvSpPr>
-          <p:nvPr>
-            <p:ph type="sldNum" idx="3"/>
-          </p:nvPr>
-        </p:nvSpPr>
-        <p:spPr/>
-        <p:txBody>
-          <a:bodyPr/>
-          <a:p>
-            <a:fld id="{CCF92D7C-0AF0-444B-8FE3-B727210CCAF3}" type="slidenum">
-              <a:t>&lt;#&gt;</a:t>
-            </a:fld>
-          </a:p>
-        </p:txBody>
-      </p:sp>
-      <p:sp>
-        <p:nvSpPr>
-          <p:cNvPr id="6" name="PlaceHolder 5"/>
-          <p:cNvSpPr>
-            <a:spLocks noGrp="1"/>
-          </p:cNvSpPr>
-          <p:nvPr>
-            <p:ph type="dt" idx="1"/>
-          </p:nvPr>
-        </p:nvSpPr>
-        <p:spPr/>
-        <p:txBody>
-          <a:bodyPr/>
-          <a:p>
-            <a:r>
-              <a:rPr lang="en-GB"/>
-              <a:t/>
-            </a:r>
           </a:p>
         </p:txBody>
       </p:sp>
     </p:spTree>
   </p:cSld>
-</p:sldLayout>
+</p:notes>
 </file>
 
-<file path=ppt/slideLayouts/slideLayout2.xml><?xml version="1.0" encoding="utf-8"?>
+<file path=ppt/notesSlides/notesSlide5.xml><?xml version="1.0" encoding="utf-8"?>
+<p:notes xmlns:a="http://schemas.openxmlformats.org/drawingml/2006/main" xmlns:p="http://schemas.openxmlformats.org/presentationml/2006/main" xmlns:r="http://schemas.openxmlformats.org/officeDocument/2006/relationships" xmlns:p14="http://schemas.microsoft.com/office/powerpoint/2010/main" xmlns:p15="http://schemas.microsoft.com/office/powerpoint/2012/main" xmlns:mc="http://schemas.openxmlformats.org/markup-compatibility/2006">
+  <p:cSld>
+    <p:spTree>
+      <p:nvGrpSpPr>
+        <p:cNvPr id="1" name=""/>
+        <p:cNvGrpSpPr/>
+        <p:nvPr/>
+      </p:nvGrpSpPr>
+      <p:grpSpPr>
+        <a:xfrm>
+          <a:off x="0" y="0"/>
+          <a:ext cx="0" cy="0"/>
+          <a:chOff x="0" y="0"/>
+          <a:chExt cx="0" cy="0"/>
+        </a:xfrm>
+      </p:grpSpPr>
+      <p:sp>
+        <p:nvSpPr>
+          <p:cNvPr id="54" name=""/>
+          <p:cNvSpPr txBox="1"/>
+          <p:nvPr/>
+        </p:nvSpPr>
+        <p:spPr>
+          <a:xfrm>
+            <a:off x="720000" y="360000"/>
+            <a:ext cx="5760000" cy="3600000"/>
+          </a:xfrm>
+          <a:prstGeom prst="rect">
+            <a:avLst/>
+          </a:prstGeom>
+          <a:solidFill>
+            <a:schemeClr val="accent1"/>
+          </a:solidFill>
+          <a:ln w="38160">
+            <a:solidFill>
+              <a:schemeClr val="accent1">
+                <a:lumMod val="75000"/>
+                <a:lumOff val="0"/>
+              </a:schemeClr>
+            </a:solidFill>
+            <a:round/>
+          </a:ln>
+        </p:spPr>
+        <p:txBody>
+          <a:bodyPr lIns="90000" tIns="45000" rIns="90000" bIns="45000" anchor="t">
+            <a:spAutoFit/>
+          </a:bodyPr>
+          <a:p>
+            <a:pPr/>
+            <a:r>
+              <a:rPr lang="en-US" sz="1800" b="0" u="none" strike="noStrike">
+                <a:solidFill>
+                  <a:srgbClr val="FFFFFF"/>
+                </a:solidFill>
+                <a:effectLst/>
+                <a:uFillTx/>
+                <a:latin typeface="Arial"/>
+              </a:rPr>
+              <a:t>Speaker note for the intro slide.</a:t>
+            </a:r>
+            <a:endParaRPr lang="en-US" sz="1800" b="0" u="none" strike="noStrike">
+              <a:solidFill>
+                <a:srgbClr val="FFFFFF"/>
+              </a:solidFill>
+              <a:effectLst/>
+              <a:uFillTx/>
+              <a:latin typeface="Arial"/>
+            </a:endParaRPr>
+          </a:p>
+        </p:txBody>
+      </p:sp>
+    </p:spTree>
+  </p:cSld>
+</p:notes>
+</file>
+
+<file path=ppt/notesSlides/notesSlide6.xml><?xml version="1.0" encoding="utf-8"?>
+<p:notes xmlns:a="http://schemas.openxmlformats.org/drawingml/2006/main" xmlns:p="http://schemas.openxmlformats.org/presentationml/2006/main" xmlns:r="http://schemas.openxmlformats.org/officeDocument/2006/relationships" xmlns:p14="http://schemas.microsoft.com/office/powerpoint/2010/main" xmlns:p15="http://schemas.microsoft.com/office/powerpoint/2012/main" xmlns:mc="http://schemas.openxmlformats.org/markup-compatibility/2006">
+  <p:cSld>
+    <p:spTree>
+      <p:nvGrpSpPr>
+        <p:cNvPr id="1" name=""/>
+        <p:cNvGrpSpPr/>
+        <p:nvPr/>
+      </p:nvGrpSpPr>
+      <p:grpSpPr>
+        <a:xfrm>
+          <a:off x="0" y="0"/>
+          <a:ext cx="0" cy="0"/>
+          <a:chOff x="0" y="0"/>
+          <a:chExt cx="0" cy="0"/>
+        </a:xfrm>
+      </p:grpSpPr>
+      <p:sp>
+        <p:nvSpPr>
+          <p:cNvPr id="55" name=""/>
+          <p:cNvSpPr txBox="1"/>
+          <p:nvPr/>
+        </p:nvSpPr>
+        <p:spPr>
+          <a:xfrm>
+            <a:off x="720000" y="360000"/>
+            <a:ext cx="5760000" cy="3600000"/>
+          </a:xfrm>
+          <a:prstGeom prst="rect">
+            <a:avLst/>
+          </a:prstGeom>
+          <a:solidFill>
+            <a:schemeClr val="accent1"/>
+          </a:solidFill>
+          <a:ln w="38160">
+            <a:solidFill>
+              <a:schemeClr val="accent1">
+                <a:lumMod val="75000"/>
+                <a:lumOff val="0"/>
+              </a:schemeClr>
+            </a:solidFill>
+            <a:round/>
+          </a:ln>
+        </p:spPr>
+        <p:txBody>
+          <a:bodyPr lIns="90000" tIns="45000" rIns="90000" bIns="45000" anchor="t">
+            <a:spAutoFit/>
+          </a:bodyPr>
+          <a:p>
+            <a:pPr/>
+            <a:r>
+              <a:rPr lang="en-US" sz="1800" b="0" u="none" strike="noStrike">
+                <a:solidFill>
+                  <a:srgbClr val="FFFFFF"/>
+                </a:solidFill>
+                <a:effectLst/>
+                <a:uFillTx/>
+                <a:latin typeface="Arial"/>
+              </a:rPr>
+              <a:t>Second slide notes mention the table.</a:t>
+            </a:r>
+            <a:endParaRPr lang="en-US" sz="1800" b="0" u="none" strike="noStrike">
+              <a:solidFill>
+                <a:srgbClr val="FFFFFF"/>
+              </a:solidFill>
+              <a:effectLst/>
+              <a:uFillTx/>
+              <a:latin typeface="Arial"/>
+            </a:endParaRPr>
+          </a:p>
+        </p:txBody>
+      </p:sp>
+    </p:spTree>
+  </p:cSld>
+</p:notes>
+</file>
+
+<file path=ppt/notesSlides/notesSlide7.xml><?xml version="1.0" encoding="utf-8"?>
+<p:notes xmlns:a="http://schemas.openxmlformats.org/drawingml/2006/main" xmlns:p="http://schemas.openxmlformats.org/presentationml/2006/main" xmlns:r="http://schemas.openxmlformats.org/officeDocument/2006/relationships" xmlns:p14="http://schemas.microsoft.com/office/powerpoint/2010/main" xmlns:p15="http://schemas.microsoft.com/office/powerpoint/2012/main" xmlns:mc="http://schemas.openxmlformats.org/markup-compatibility/2006">
+  <p:cSld>
+    <p:spTree>
+      <p:nvGrpSpPr>
+        <p:cNvPr id="1" name=""/>
+        <p:cNvGrpSpPr/>
+        <p:nvPr/>
+      </p:nvGrpSpPr>
+      <p:grpSpPr>
+        <a:xfrm>
+          <a:off x="0" y="0"/>
+          <a:ext cx="0" cy="0"/>
+          <a:chOff x="0" y="0"/>
+          <a:chExt cx="0" cy="0"/>
+        </a:xfrm>
+      </p:grpSpPr>
+      <p:sp>
+        <p:nvSpPr>
+          <p:cNvPr id="56" name=""/>
+          <p:cNvSpPr txBox="1"/>
+          <p:nvPr/>
+        </p:nvSpPr>
+        <p:spPr>
+          <a:xfrm>
+            <a:off x="720000" y="360000"/>
+            <a:ext cx="5760000" cy="3600000"/>
+          </a:xfrm>
+          <a:prstGeom prst="rect">
+            <a:avLst/>
+          </a:prstGeom>
+          <a:solidFill>
+            <a:schemeClr val="accent1"/>
+          </a:solidFill>
+          <a:ln w="38160">
+            <a:solidFill>
+              <a:schemeClr val="accent1">
+                <a:lumMod val="75000"/>
+                <a:lumOff val="0"/>
+              </a:schemeClr>
+            </a:solidFill>
+            <a:round/>
+          </a:ln>
+        </p:spPr>
+        <p:txBody>
+          <a:bodyPr lIns="90000" tIns="45000" rIns="90000" bIns="45000" anchor="t">
+            <a:spAutoFit/>
+          </a:bodyPr>
+          <a:p>
+            <a:pPr/>
+            <a:r>
+              <a:rPr lang="en-US" sz="1800" b="0" u="none" strike="noStrike">
+                <a:solidFill>
+                  <a:srgbClr val="FFFFFF"/>
+                </a:solidFill>
+                <a:effectLst/>
+                <a:uFillTx/>
+                <a:latin typeface="Arial"/>
+              </a:rPr>
+              <a:t>Speaker note for the intro slide.</a:t>
+            </a:r>
+            <a:endParaRPr lang="en-US" sz="1800" b="0" u="none" strike="noStrike">
+              <a:solidFill>
+                <a:srgbClr val="FFFFFF"/>
+              </a:solidFill>
+              <a:effectLst/>
+              <a:uFillTx/>
+              <a:latin typeface="Arial"/>
+            </a:endParaRPr>
+          </a:p>
+        </p:txBody>
+      </p:sp>
+    </p:spTree>
+  </p:cSld>
+</p:notes>
+</file>
+
+<file path=ppt/notesSlides/notesSlide8.xml><?xml version="1.0" encoding="utf-8"?>
+<p:notes xmlns:a="http://schemas.openxmlformats.org/drawingml/2006/main" xmlns:p="http://schemas.openxmlformats.org/presentationml/2006/main" xmlns:r="http://schemas.openxmlformats.org/officeDocument/2006/relationships" xmlns:p14="http://schemas.microsoft.com/office/powerpoint/2010/main" xmlns:p15="http://schemas.microsoft.com/office/powerpoint/2012/main" xmlns:mc="http://schemas.openxmlformats.org/markup-compatibility/2006">
+  <p:cSld>
+    <p:spTree>
+      <p:nvGrpSpPr>
+        <p:cNvPr id="1" name=""/>
+        <p:cNvGrpSpPr/>
+        <p:nvPr/>
+      </p:nvGrpSpPr>
+      <p:grpSpPr>
+        <a:xfrm>
+          <a:off x="0" y="0"/>
+          <a:ext cx="0" cy="0"/>
+          <a:chOff x="0" y="0"/>
+          <a:chExt cx="0" cy="0"/>
+        </a:xfrm>
+      </p:grpSpPr>
+      <p:sp>
+        <p:nvSpPr>
+          <p:cNvPr id="57" name=""/>
+          <p:cNvSpPr txBox="1"/>
+          <p:nvPr/>
+        </p:nvSpPr>
+        <p:spPr>
+          <a:xfrm>
+            <a:off x="720000" y="360000"/>
+            <a:ext cx="5760000" cy="3600000"/>
+          </a:xfrm>
+          <a:prstGeom prst="rect">
+            <a:avLst/>
+          </a:prstGeom>
+          <a:solidFill>
+            <a:schemeClr val="accent1"/>
+          </a:solidFill>
+          <a:ln w="38160">
+            <a:solidFill>
+              <a:schemeClr val="accent1">
+                <a:lumMod val="75000"/>
+                <a:lumOff val="0"/>
+              </a:schemeClr>
+            </a:solidFill>
+            <a:round/>
+          </a:ln>
+        </p:spPr>
+        <p:txBody>
+          <a:bodyPr lIns="90000" tIns="45000" rIns="90000" bIns="45000" anchor="t">
+            <a:spAutoFit/>
+          </a:bodyPr>
+          <a:p>
+            <a:pPr/>
+            <a:r>
+              <a:rPr lang="en-US" sz="1800" b="0" u="none" strike="noStrike">
+                <a:solidFill>
+                  <a:srgbClr val="FFFFFF"/>
+                </a:solidFill>
+                <a:effectLst/>
+                <a:uFillTx/>
+                <a:latin typeface="Arial"/>
+              </a:rPr>
+              <a:t>Second slide notes mention the table.</a:t>
+            </a:r>
+            <a:endParaRPr lang="en-US" sz="1800" b="0" u="none" strike="noStrike">
+              <a:solidFill>
+                <a:srgbClr val="FFFFFF"/>
+              </a:solidFill>
+              <a:effectLst/>
+              <a:uFillTx/>
+              <a:latin typeface="Arial"/>
+            </a:endParaRPr>
+          </a:p>
+        </p:txBody>
+      </p:sp>
+    </p:spTree>
+  </p:cSld>
+</p:notes>
+</file>
+
+<file path=ppt/notesSlides/notesSlide9.xml><?xml version="1.0" encoding="utf-8"?>
+<p:notes xmlns:a="http://schemas.openxmlformats.org/drawingml/2006/main" xmlns:p="http://schemas.openxmlformats.org/presentationml/2006/main" xmlns:r="http://schemas.openxmlformats.org/officeDocument/2006/relationships" xmlns:p14="http://schemas.microsoft.com/office/powerpoint/2010/main" xmlns:p15="http://schemas.microsoft.com/office/powerpoint/2012/main" xmlns:mc="http://schemas.openxmlformats.org/markup-compatibility/2006">
+  <p:cSld>
+    <p:spTree>
+      <p:nvGrpSpPr>
+        <p:cNvPr id="1" name=""/>
+        <p:cNvGrpSpPr/>
+        <p:nvPr/>
+      </p:nvGrpSpPr>
+      <p:grpSpPr>
+        <a:xfrm>
+          <a:off x="0" y="0"/>
+          <a:ext cx="0" cy="0"/>
+          <a:chOff x="0" y="0"/>
+          <a:chExt cx="0" cy="0"/>
+        </a:xfrm>
+      </p:grpSpPr>
+      <p:sp>
+        <p:nvSpPr>
+          <p:cNvPr id="58" name=""/>
+          <p:cNvSpPr txBox="1"/>
+          <p:nvPr/>
+        </p:nvSpPr>
+        <p:spPr>
+          <a:xfrm>
+            <a:off x="720000" y="360000"/>
+            <a:ext cx="5760000" cy="3600000"/>
+          </a:xfrm>
+          <a:prstGeom prst="rect">
+            <a:avLst/>
+          </a:prstGeom>
+          <a:solidFill>
+            <a:schemeClr val="accent1"/>
+          </a:solidFill>
+          <a:ln w="38160">
+            <a:solidFill>
+              <a:schemeClr val="accent1">
+                <a:lumMod val="75000"/>
+                <a:lumOff val="0"/>
+              </a:schemeClr>
+            </a:solidFill>
+            <a:round/>
+          </a:ln>
+        </p:spPr>
+        <p:txBody>
+          <a:bodyPr lIns="90000" tIns="45000" rIns="90000" bIns="45000" anchor="t">
+            <a:spAutoFit/>
+          </a:bodyPr>
+          <a:p>
+            <a:pPr/>
+            <a:r>
+              <a:rPr lang="en-US" sz="1800" b="0" u="none" strike="noStrike">
+                <a:solidFill>
+                  <a:srgbClr val="FFFFFF"/>
+                </a:solidFill>
+                <a:effectLst/>
+                <a:uFillTx/>
+                <a:latin typeface="Arial"/>
+              </a:rPr>
+              <a:t>Speaker note for the intro slide.</a:t>
+            </a:r>
+            <a:endParaRPr lang="en-US" sz="1800" b="0" u="none" strike="noStrike">
+              <a:solidFill>
+                <a:srgbClr val="FFFFFF"/>
+              </a:solidFill>
+              <a:effectLst/>
+              <a:uFillTx/>
+              <a:latin typeface="Arial"/>
+            </a:endParaRPr>
+          </a:p>
+        </p:txBody>
+      </p:sp>
+    </p:spTree>
+  </p:cSld>
+</p:notes>
+</file>
+
+<file path=ppt/slideLayouts/slideLayout1.xml><?xml version="1.0" encoding="utf-8"?>
 <p:sldLayout xmlns:a="http://schemas.openxmlformats.org/drawingml/2006/main" xmlns:p="http://schemas.openxmlformats.org/presentationml/2006/main" xmlns:r="http://schemas.openxmlformats.org/officeDocument/2006/relationships" xmlns:p14="http://schemas.microsoft.com/office/powerpoint/2010/main" xmlns:p15="http://schemas.microsoft.com/office/powerpoint/2012/main" xmlns:mc="http://schemas.openxmlformats.org/markup-compatibility/2006" type="blank" preserve="1">
   <p:cSld name="Default">
     <p:spTree>
@@ -756,7 +1223,7 @@
         <p:txBody>
           <a:bodyPr/>
           <a:p>
-            <a:fld id="{2C763E3F-4F6B-45CB-BC45-CA6394BB2FF9}" type="slidenum">
+            <a:fld id="{3D56FBFB-088E-4F0C-86A9-4E3F2546A99F}" type="slidenum">
               <a:t>&lt;#&gt;</a:t>
             </a:fld>
           </a:p>
@@ -777,7 +1244,174 @@
           <a:bodyPr/>
           <a:p>
             <a:r>
-              <a:rPr lang="en-GB"/>
+              <a:rPr lang="en-US"/>
+              <a:t/>
+            </a:r>
+          </a:p>
+        </p:txBody>
+      </p:sp>
+    </p:spTree>
+  </p:cSld>
+</p:sldLayout>
+</file>
+
+<file path=ppt/slideLayouts/slideLayout2.xml><?xml version="1.0" encoding="utf-8"?>
+<p:sldLayout xmlns:a="http://schemas.openxmlformats.org/drawingml/2006/main" xmlns:p="http://schemas.openxmlformats.org/presentationml/2006/main" xmlns:r="http://schemas.openxmlformats.org/officeDocument/2006/relationships" xmlns:p14="http://schemas.microsoft.com/office/powerpoint/2010/main" xmlns:p15="http://schemas.microsoft.com/office/powerpoint/2012/main" xmlns:mc="http://schemas.openxmlformats.org/markup-compatibility/2006" type="title" preserve="1">
+  <p:cSld name="Default">
+    <p:spTree>
+      <p:nvGrpSpPr>
+        <p:cNvPr id="1" name=""/>
+        <p:cNvGrpSpPr/>
+        <p:nvPr/>
+      </p:nvGrpSpPr>
+      <p:grpSpPr>
+        <a:xfrm>
+          <a:off x="0" y="0"/>
+          <a:ext cx="0" cy="0"/>
+          <a:chOff x="0" y="0"/>
+          <a:chExt cx="0" cy="0"/>
+        </a:xfrm>
+      </p:grpSpPr>
+      <p:sp>
+        <p:nvSpPr>
+          <p:cNvPr id="7" name="PlaceHolder 1"/>
+          <p:cNvSpPr>
+            <a:spLocks noGrp="1"/>
+          </p:cNvSpPr>
+          <p:nvPr>
+            <p:ph type="title"/>
+          </p:nvPr>
+        </p:nvSpPr>
+        <p:spPr>
+          <a:xfrm>
+            <a:off x="504000" y="226080"/>
+            <a:ext cx="9071640" cy="946440"/>
+          </a:xfrm>
+          <a:prstGeom prst="rect">
+            <a:avLst/>
+          </a:prstGeom>
+          <a:noFill/>
+          <a:ln w="0">
+            <a:noFill/>
+          </a:ln>
+        </p:spPr>
+        <p:txBody>
+          <a:bodyPr lIns="0" tIns="0" rIns="0" bIns="0" anchor="ctr">
+            <a:spAutoFit/>
+          </a:bodyPr>
+          <a:p>
+            <a:pPr indent="0" algn="ctr">
+              <a:buNone/>
+            </a:pPr>
+            <a:endParaRPr lang="en-US" sz="4400" b="0" u="none" strike="noStrike">
+              <a:solidFill>
+                <a:srgbClr val="000000"/>
+              </a:solidFill>
+              <a:effectLst/>
+              <a:uFillTx/>
+              <a:latin typeface="Arial"/>
+            </a:endParaRPr>
+          </a:p>
+        </p:txBody>
+      </p:sp>
+      <p:sp>
+        <p:nvSpPr>
+          <p:cNvPr id="8" name="PlaceHolder 2"/>
+          <p:cNvSpPr>
+            <a:spLocks noGrp="1"/>
+          </p:cNvSpPr>
+          <p:nvPr>
+            <p:ph type="subTitle"/>
+          </p:nvPr>
+        </p:nvSpPr>
+        <p:spPr>
+          <a:xfrm>
+            <a:off x="504000" y="1326600"/>
+            <a:ext cx="9071640" cy="3288240"/>
+          </a:xfrm>
+          <a:prstGeom prst="rect">
+            <a:avLst/>
+          </a:prstGeom>
+          <a:noFill/>
+          <a:ln w="0">
+            <a:noFill/>
+          </a:ln>
+        </p:spPr>
+        <p:txBody>
+          <a:bodyPr lIns="0" tIns="0" rIns="0" bIns="0" anchor="ctr">
+            <a:spAutoFit/>
+          </a:bodyPr>
+          <a:p>
+            <a:pPr indent="0" algn="ctr">
+              <a:buNone/>
+            </a:pPr>
+            <a:endParaRPr lang="en-US" sz="3200" b="0" u="none" strike="noStrike">
+              <a:solidFill>
+                <a:srgbClr val="000000"/>
+              </a:solidFill>
+              <a:effectLst/>
+              <a:uFillTx/>
+              <a:latin typeface="Arial"/>
+            </a:endParaRPr>
+          </a:p>
+        </p:txBody>
+      </p:sp>
+      <p:sp>
+        <p:nvSpPr>
+          <p:cNvPr id="4" name="PlaceHolder 3"/>
+          <p:cNvSpPr>
+            <a:spLocks noGrp="1"/>
+          </p:cNvSpPr>
+          <p:nvPr>
+            <p:ph type="ftr" idx="2"/>
+          </p:nvPr>
+        </p:nvSpPr>
+        <p:spPr/>
+        <p:txBody>
+          <a:bodyPr/>
+          <a:p>
+            <a:r>
+              <a:t>Footer</a:t>
+            </a:r>
+          </a:p>
+        </p:txBody>
+      </p:sp>
+      <p:sp>
+        <p:nvSpPr>
+          <p:cNvPr id="5" name="PlaceHolder 4"/>
+          <p:cNvSpPr>
+            <a:spLocks noGrp="1"/>
+          </p:cNvSpPr>
+          <p:nvPr>
+            <p:ph type="sldNum" idx="3"/>
+          </p:nvPr>
+        </p:nvSpPr>
+        <p:spPr/>
+        <p:txBody>
+          <a:bodyPr/>
+          <a:p>
+            <a:fld id="{F87F6038-B483-4DC0-B1CD-051FF153B154}" type="slidenum">
+              <a:t>&lt;#&gt;</a:t>
+            </a:fld>
+          </a:p>
+        </p:txBody>
+      </p:sp>
+      <p:sp>
+        <p:nvSpPr>
+          <p:cNvPr id="6" name="PlaceHolder 5"/>
+          <p:cNvSpPr>
+            <a:spLocks noGrp="1"/>
+          </p:cNvSpPr>
+          <p:nvPr>
+            <p:ph type="dt" idx="1"/>
+          </p:nvPr>
+        </p:nvSpPr>
+        <p:spPr/>
+        <p:txBody>
+          <a:bodyPr/>
+          <a:p>
+            <a:r>
+              <a:rPr lang="en-US"/>
               <a:t/>
             </a:r>
           </a:p>
@@ -807,7 +1441,7 @@
       </p:grpSpPr>
       <p:sp>
         <p:nvSpPr>
-          <p:cNvPr id="0" name="PlaceHolder 1"/>
+          <p:cNvPr id="2" name="PlaceHolder 1"/>
           <p:cNvSpPr>
             <a:spLocks noGrp="1"/>
           </p:cNvSpPr>
@@ -829,17 +1463,30 @@
           </a:ln>
         </p:spPr>
         <p:txBody>
-          <a:bodyPr lIns="0" rIns="0" tIns="0" bIns="0" anchor="ctr">
+          <a:bodyPr lIns="0" tIns="0" rIns="0" bIns="0" anchor="ctr">
             <a:noAutofit/>
           </a:bodyPr>
+          <a:lstStyle>
+            <a:lvl1pPr indent="0" algn="ctr">
+              <a:buNone/>
+              <a:defRPr lang="en-US" sz="4400" b="0" u="none" strike="noStrike">
+                <a:solidFill>
+                  <a:srgbClr val="000000"/>
+                </a:solidFill>
+                <a:effectLst/>
+                <a:uFillTx/>
+                <a:latin typeface="Arial"/>
+              </a:defRPr>
+            </a:lvl1pPr>
+          </a:lstStyle>
           <a:p>
             <a:pPr indent="0" algn="ctr">
               <a:buNone/>
             </a:pPr>
             <a:r>
-              <a:rPr b="0" lang="en-GB" sz="4400" strike="noStrike" u="none">
-                <a:solidFill>
-                  <a:srgbClr val="ffffff"/>
+              <a:rPr lang="en-US" sz="4400" b="0" u="none" strike="noStrike">
+                <a:solidFill>
+                  <a:srgbClr val="000000"/>
                 </a:solidFill>
                 <a:effectLst/>
                 <a:uFillTx/>
@@ -847,9 +1494,9 @@
               </a:rPr>
               <a:t>Click to edit the title text format</a:t>
             </a:r>
-            <a:endParaRPr b="0" lang="en-GB" sz="4400" strike="noStrike" u="none">
-              <a:solidFill>
-                <a:srgbClr val="ffffff"/>
+            <a:endParaRPr lang="en-US" sz="4400" b="0" u="none" strike="noStrike">
+              <a:solidFill>
+                <a:srgbClr val="000000"/>
               </a:solidFill>
               <a:effectLst/>
               <a:uFillTx/>
@@ -860,7 +1507,7 @@
       </p:sp>
       <p:sp>
         <p:nvSpPr>
-          <p:cNvPr id="1" name="PlaceHolder 2"/>
+          <p:cNvPr id="3" name="PlaceHolder 2"/>
           <p:cNvSpPr>
             <a:spLocks noGrp="1"/>
           </p:cNvSpPr>
@@ -882,25 +1529,160 @@
           </a:ln>
         </p:spPr>
         <p:txBody>
-          <a:bodyPr lIns="0" rIns="0" tIns="0" bIns="0" anchor="t">
+          <a:bodyPr lIns="0" tIns="0" rIns="0" bIns="0" anchor="t">
             <a:normAutofit/>
           </a:bodyPr>
-          <a:p>
-            <a:pPr marL="432000" indent="-324000">
+          <a:lstStyle>
+            <a:lvl1pPr algn="l">
               <a:spcBef>
                 <a:spcPts val="1417"/>
               </a:spcBef>
               <a:buClr>
-                <a:srgbClr val="ffffff"/>
+                <a:srgbClr val="000000"/>
+              </a:buClr>
+              <a:buSzPct val="45000"/>
+              <a:buFont typeface="Wingdings" charset="2"/>
+              <a:buChar char=""/>
+              <a:defRPr lang="en-US" sz="3200" b="0" u="none" strike="noStrike">
+                <a:solidFill>
+                  <a:srgbClr val="000000"/>
+                </a:solidFill>
+                <a:effectLst/>
+                <a:uFillTx/>
+                <a:latin typeface="Arial"/>
+              </a:defRPr>
+            </a:lvl1pPr>
+            <a:lvl2pPr lvl="1" algn="l">
+              <a:spcBef>
+                <a:spcPts val="1134"/>
+              </a:spcBef>
+              <a:buClr>
+                <a:srgbClr val="000000"/>
+              </a:buClr>
+              <a:buSzPct val="75000"/>
+              <a:buFont typeface="Symbol" charset="2"/>
+              <a:buChar char=""/>
+              <a:defRPr lang="en-US" sz="2800" b="0" u="none" strike="noStrike">
+                <a:solidFill>
+                  <a:srgbClr val="000000"/>
+                </a:solidFill>
+                <a:effectLst/>
+                <a:uFillTx/>
+                <a:latin typeface="Arial"/>
+              </a:defRPr>
+            </a:lvl2pPr>
+            <a:lvl3pPr lvl="2" algn="l">
+              <a:spcBef>
+                <a:spcPts val="850"/>
+              </a:spcBef>
+              <a:buClr>
+                <a:srgbClr val="000000"/>
+              </a:buClr>
+              <a:buSzPct val="45000"/>
+              <a:buFont typeface="Wingdings" charset="2"/>
+              <a:buChar char=""/>
+              <a:defRPr lang="en-US" sz="2400" b="0" u="none" strike="noStrike">
+                <a:solidFill>
+                  <a:srgbClr val="000000"/>
+                </a:solidFill>
+                <a:effectLst/>
+                <a:uFillTx/>
+                <a:latin typeface="Arial"/>
+              </a:defRPr>
+            </a:lvl3pPr>
+            <a:lvl4pPr lvl="3" algn="l">
+              <a:spcBef>
+                <a:spcPts val="567"/>
+              </a:spcBef>
+              <a:buClr>
+                <a:srgbClr val="000000"/>
+              </a:buClr>
+              <a:buSzPct val="75000"/>
+              <a:buFont typeface="Symbol" charset="2"/>
+              <a:buChar char=""/>
+              <a:defRPr lang="en-US" sz="2000" b="0" u="none" strike="noStrike">
+                <a:solidFill>
+                  <a:srgbClr val="000000"/>
+                </a:solidFill>
+                <a:effectLst/>
+                <a:uFillTx/>
+                <a:latin typeface="Arial"/>
+              </a:defRPr>
+            </a:lvl4pPr>
+            <a:lvl5pPr lvl="4" algn="l">
+              <a:spcBef>
+                <a:spcPts val="283"/>
+              </a:spcBef>
+              <a:buClr>
+                <a:srgbClr val="000000"/>
+              </a:buClr>
+              <a:buSzPct val="45000"/>
+              <a:buFont typeface="Wingdings" charset="2"/>
+              <a:buChar char=""/>
+              <a:defRPr lang="en-US" sz="2000" b="0" u="none" strike="noStrike">
+                <a:solidFill>
+                  <a:srgbClr val="000000"/>
+                </a:solidFill>
+                <a:effectLst/>
+                <a:uFillTx/>
+                <a:latin typeface="Arial"/>
+              </a:defRPr>
+            </a:lvl5pPr>
+            <a:lvl6pPr lvl="5" algn="l">
+              <a:spcBef>
+                <a:spcPts val="283"/>
+              </a:spcBef>
+              <a:buClr>
+                <a:srgbClr val="000000"/>
+              </a:buClr>
+              <a:buSzPct val="45000"/>
+              <a:buFont typeface="Wingdings" charset="2"/>
+              <a:buChar char=""/>
+              <a:defRPr lang="en-US" sz="2000" b="0" u="none" strike="noStrike">
+                <a:solidFill>
+                  <a:srgbClr val="000000"/>
+                </a:solidFill>
+                <a:effectLst/>
+                <a:uFillTx/>
+                <a:latin typeface="Arial"/>
+              </a:defRPr>
+            </a:lvl6pPr>
+            <a:lvl7pPr lvl="6" algn="l">
+              <a:spcBef>
+                <a:spcPts val="283"/>
+              </a:spcBef>
+              <a:buClr>
+                <a:srgbClr val="000000"/>
+              </a:buClr>
+              <a:buSzPct val="45000"/>
+              <a:buFont typeface="Wingdings" charset="2"/>
+              <a:buChar char=""/>
+              <a:defRPr lang="en-US" sz="2000" b="0" u="none" strike="noStrike">
+                <a:solidFill>
+                  <a:srgbClr val="000000"/>
+                </a:solidFill>
+                <a:effectLst/>
+                <a:uFillTx/>
+                <a:latin typeface="Arial"/>
+              </a:defRPr>
+            </a:lvl7pPr>
+          </a:lstStyle>
+          <a:p>
+            <a:pPr marL="432000" indent="-324000" algn="l">
+              <a:spcBef>
+                <a:spcPts val="1417"/>
+              </a:spcBef>
+              <a:buClr>
+                <a:srgbClr val="000000"/>
               </a:buClr>
               <a:buSzPct val="45000"/>
               <a:buFont typeface="Wingdings" charset="2"/>
               <a:buChar char=""/>
             </a:pPr>
             <a:r>
-              <a:rPr b="0" lang="en-GB" sz="3200" strike="noStrike" u="none">
-                <a:solidFill>
-                  <a:srgbClr val="ffffff"/>
+              <a:rPr lang="en-US" sz="3200" b="0" u="none" strike="noStrike">
+                <a:solidFill>
+                  <a:srgbClr val="000000"/>
                 </a:solidFill>
                 <a:effectLst/>
                 <a:uFillTx/>
@@ -908,9 +1690,9 @@
               </a:rPr>
               <a:t>Click to edit the outline text format</a:t>
             </a:r>
-            <a:endParaRPr b="0" lang="en-GB" sz="3200" strike="noStrike" u="none">
-              <a:solidFill>
-                <a:srgbClr val="ffffff"/>
+            <a:endParaRPr lang="en-US" sz="3200" b="0" u="none" strike="noStrike">
+              <a:solidFill>
+                <a:srgbClr val="000000"/>
               </a:solidFill>
               <a:effectLst/>
               <a:uFillTx/>
@@ -918,21 +1700,21 @@
             </a:endParaRPr>
           </a:p>
           <a:p>
-            <a:pPr lvl="1" marL="864000" indent="-324000">
+            <a:pPr marL="864000" lvl="1" indent="-324000" algn="l">
               <a:spcBef>
                 <a:spcPts val="1134"/>
               </a:spcBef>
               <a:buClr>
-                <a:srgbClr val="ffffff"/>
+                <a:srgbClr val="000000"/>
               </a:buClr>
               <a:buSzPct val="75000"/>
               <a:buFont typeface="Symbol" charset="2"/>
               <a:buChar char=""/>
             </a:pPr>
             <a:r>
-              <a:rPr b="0" lang="en-GB" sz="2800" strike="noStrike" u="none">
-                <a:solidFill>
-                  <a:srgbClr val="ffffff"/>
+              <a:rPr lang="en-US" sz="2800" b="0" u="none" strike="noStrike">
+                <a:solidFill>
+                  <a:srgbClr val="000000"/>
                 </a:solidFill>
                 <a:effectLst/>
                 <a:uFillTx/>
@@ -940,9 +1722,9 @@
               </a:rPr>
               <a:t>Second Outline Level</a:t>
             </a:r>
-            <a:endParaRPr b="0" lang="en-GB" sz="2800" strike="noStrike" u="none">
-              <a:solidFill>
-                <a:srgbClr val="ffffff"/>
+            <a:endParaRPr lang="en-US" sz="2800" b="0" u="none" strike="noStrike">
+              <a:solidFill>
+                <a:srgbClr val="000000"/>
               </a:solidFill>
               <a:effectLst/>
               <a:uFillTx/>
@@ -950,21 +1732,21 @@
             </a:endParaRPr>
           </a:p>
           <a:p>
-            <a:pPr lvl="2" marL="1296000" indent="-288000">
+            <a:pPr marL="1296000" lvl="2" indent="-288000" algn="l">
               <a:spcBef>
                 <a:spcPts val="850"/>
               </a:spcBef>
               <a:buClr>
-                <a:srgbClr val="ffffff"/>
+                <a:srgbClr val="000000"/>
               </a:buClr>
               <a:buSzPct val="45000"/>
               <a:buFont typeface="Wingdings" charset="2"/>
               <a:buChar char=""/>
             </a:pPr>
             <a:r>
-              <a:rPr b="0" lang="en-GB" sz="2400" strike="noStrike" u="none">
-                <a:solidFill>
-                  <a:srgbClr val="ffffff"/>
+              <a:rPr lang="en-US" sz="2400" b="0" u="none" strike="noStrike">
+                <a:solidFill>
+                  <a:srgbClr val="000000"/>
                 </a:solidFill>
                 <a:effectLst/>
                 <a:uFillTx/>
@@ -972,9 +1754,9 @@
               </a:rPr>
               <a:t>Third Outline Level</a:t>
             </a:r>
-            <a:endParaRPr b="0" lang="en-GB" sz="2400" strike="noStrike" u="none">
-              <a:solidFill>
-                <a:srgbClr val="ffffff"/>
+            <a:endParaRPr lang="en-US" sz="2400" b="0" u="none" strike="noStrike">
+              <a:solidFill>
+                <a:srgbClr val="000000"/>
               </a:solidFill>
               <a:effectLst/>
               <a:uFillTx/>
@@ -982,21 +1764,21 @@
             </a:endParaRPr>
           </a:p>
           <a:p>
-            <a:pPr lvl="3" marL="1728000" indent="-216000">
+            <a:pPr marL="1728000" lvl="3" indent="-216000" algn="l">
               <a:spcBef>
                 <a:spcPts val="567"/>
               </a:spcBef>
               <a:buClr>
-                <a:srgbClr val="ffffff"/>
+                <a:srgbClr val="000000"/>
               </a:buClr>
               <a:buSzPct val="75000"/>
               <a:buFont typeface="Symbol" charset="2"/>
               <a:buChar char=""/>
             </a:pPr>
             <a:r>
-              <a:rPr b="0" lang="en-GB" sz="2000" strike="noStrike" u="none">
-                <a:solidFill>
-                  <a:srgbClr val="ffffff"/>
+              <a:rPr lang="en-US" sz="2000" b="0" u="none" strike="noStrike">
+                <a:solidFill>
+                  <a:srgbClr val="000000"/>
                 </a:solidFill>
                 <a:effectLst/>
                 <a:uFillTx/>
@@ -1004,9 +1786,9 @@
               </a:rPr>
               <a:t>Fourth Outline Level</a:t>
             </a:r>
-            <a:endParaRPr b="0" lang="en-GB" sz="2000" strike="noStrike" u="none">
-              <a:solidFill>
-                <a:srgbClr val="ffffff"/>
+            <a:endParaRPr lang="en-US" sz="2000" b="0" u="none" strike="noStrike">
+              <a:solidFill>
+                <a:srgbClr val="000000"/>
               </a:solidFill>
               <a:effectLst/>
               <a:uFillTx/>
@@ -1014,21 +1796,21 @@
             </a:endParaRPr>
           </a:p>
           <a:p>
-            <a:pPr lvl="4" marL="2160000" indent="-216000">
+            <a:pPr marL="2160000" lvl="4" indent="-216000" algn="l">
               <a:spcBef>
                 <a:spcPts val="283"/>
               </a:spcBef>
               <a:buClr>
-                <a:srgbClr val="ffffff"/>
+                <a:srgbClr val="000000"/>
               </a:buClr>
               <a:buSzPct val="45000"/>
               <a:buFont typeface="Wingdings" charset="2"/>
               <a:buChar char=""/>
             </a:pPr>
             <a:r>
-              <a:rPr b="0" lang="en-GB" sz="2000" strike="noStrike" u="none">
-                <a:solidFill>
-                  <a:srgbClr val="ffffff"/>
+              <a:rPr lang="en-US" sz="2000" b="0" u="none" strike="noStrike">
+                <a:solidFill>
+                  <a:srgbClr val="000000"/>
                 </a:solidFill>
                 <a:effectLst/>
                 <a:uFillTx/>
@@ -1036,9 +1818,9 @@
               </a:rPr>
               <a:t>Fifth Outline Level</a:t>
             </a:r>
-            <a:endParaRPr b="0" lang="en-GB" sz="2000" strike="noStrike" u="none">
-              <a:solidFill>
-                <a:srgbClr val="ffffff"/>
+            <a:endParaRPr lang="en-US" sz="2000" b="0" u="none" strike="noStrike">
+              <a:solidFill>
+                <a:srgbClr val="000000"/>
               </a:solidFill>
               <a:effectLst/>
               <a:uFillTx/>
@@ -1046,21 +1828,21 @@
             </a:endParaRPr>
           </a:p>
           <a:p>
-            <a:pPr lvl="5" marL="2592000" indent="-216000">
+            <a:pPr marL="2592000" lvl="5" indent="-216000" algn="l">
               <a:spcBef>
                 <a:spcPts val="283"/>
               </a:spcBef>
               <a:buClr>
-                <a:srgbClr val="ffffff"/>
+                <a:srgbClr val="000000"/>
               </a:buClr>
               <a:buSzPct val="45000"/>
               <a:buFont typeface="Wingdings" charset="2"/>
               <a:buChar char=""/>
             </a:pPr>
             <a:r>
-              <a:rPr b="0" lang="en-GB" sz="2000" strike="noStrike" u="none">
-                <a:solidFill>
-                  <a:srgbClr val="ffffff"/>
+              <a:rPr lang="en-US" sz="2000" b="0" u="none" strike="noStrike">
+                <a:solidFill>
+                  <a:srgbClr val="000000"/>
                 </a:solidFill>
                 <a:effectLst/>
                 <a:uFillTx/>
@@ -1068,9 +1850,9 @@
               </a:rPr>
               <a:t>Sixth Outline Level</a:t>
             </a:r>
-            <a:endParaRPr b="0" lang="en-GB" sz="2000" strike="noStrike" u="none">
-              <a:solidFill>
-                <a:srgbClr val="ffffff"/>
+            <a:endParaRPr lang="en-US" sz="2000" b="0" u="none" strike="noStrike">
+              <a:solidFill>
+                <a:srgbClr val="000000"/>
               </a:solidFill>
               <a:effectLst/>
               <a:uFillTx/>
@@ -1078,21 +1860,21 @@
             </a:endParaRPr>
           </a:p>
           <a:p>
-            <a:pPr lvl="6" marL="3024000" indent="-216000">
+            <a:pPr marL="3024000" lvl="6" indent="-216000" algn="l">
               <a:spcBef>
                 <a:spcPts val="283"/>
               </a:spcBef>
               <a:buClr>
-                <a:srgbClr val="ffffff"/>
+                <a:srgbClr val="000000"/>
               </a:buClr>
               <a:buSzPct val="45000"/>
               <a:buFont typeface="Wingdings" charset="2"/>
               <a:buChar char=""/>
             </a:pPr>
             <a:r>
-              <a:rPr b="0" lang="en-GB" sz="2000" strike="noStrike" u="none">
-                <a:solidFill>
-                  <a:srgbClr val="ffffff"/>
+              <a:rPr lang="en-US" sz="2000" b="0" u="none" strike="noStrike">
+                <a:solidFill>
+                  <a:srgbClr val="000000"/>
                 </a:solidFill>
                 <a:effectLst/>
                 <a:uFillTx/>
@@ -1100,9 +1882,9 @@
               </a:rPr>
               <a:t>Seventh Outline Level</a:t>
             </a:r>
-            <a:endParaRPr b="0" lang="en-GB" sz="2000" strike="noStrike" u="none">
-              <a:solidFill>
-                <a:srgbClr val="ffffff"/>
+            <a:endParaRPr lang="en-US" sz="2000" b="0" u="none" strike="noStrike">
+              <a:solidFill>
+                <a:srgbClr val="000000"/>
               </a:solidFill>
               <a:effectLst/>
               <a:uFillTx/>
@@ -1113,7 +1895,7 @@
       </p:sp>
       <p:sp>
         <p:nvSpPr>
-          <p:cNvPr id="2" name="PlaceHolder 3"/>
+          <p:cNvPr id="4" name="PlaceHolder 3"/>
           <p:cNvSpPr>
             <a:spLocks noGrp="1"/>
           </p:cNvSpPr>
@@ -1135,15 +1917,15 @@
           </a:ln>
         </p:spPr>
         <p:txBody>
-          <a:bodyPr lIns="0" rIns="0" tIns="0" bIns="0" anchor="t">
+          <a:bodyPr lIns="0" tIns="0" rIns="0" bIns="0" anchor="t">
             <a:noAutofit/>
           </a:bodyPr>
           <a:lstStyle>
-            <a:lvl1pPr indent="0">
+            <a:lvl1pPr indent="0" algn="l">
               <a:buNone/>
-              <a:defRPr b="0" lang="en-GB" sz="1400" strike="noStrike" u="none">
-                <a:solidFill>
-                  <a:srgbClr val="ffffff"/>
+              <a:defRPr lang="en-US" sz="1400" b="0" u="none" strike="noStrike">
+                <a:solidFill>
+                  <a:srgbClr val="000000"/>
                 </a:solidFill>
                 <a:effectLst/>
                 <a:uFillTx/>
@@ -1152,13 +1934,13 @@
             </a:lvl1pPr>
           </a:lstStyle>
           <a:p>
-            <a:pPr indent="0">
+            <a:pPr indent="0" algn="l">
               <a:buNone/>
             </a:pPr>
             <a:r>
-              <a:rPr b="0" lang="en-GB" sz="1400" strike="noStrike" u="none">
-                <a:solidFill>
-                  <a:srgbClr val="ffffff"/>
+              <a:rPr lang="en-US" sz="1400" b="0" u="none" strike="noStrike">
+                <a:solidFill>
+                  <a:srgbClr val="000000"/>
                 </a:solidFill>
                 <a:effectLst/>
                 <a:uFillTx/>
@@ -1166,9 +1948,9 @@
               </a:rPr>
               <a:t>&lt;date/time&gt;</a:t>
             </a:r>
-            <a:endParaRPr b="0" lang="en-GB" sz="1400" strike="noStrike" u="none">
-              <a:solidFill>
-                <a:srgbClr val="ffffff"/>
+            <a:endParaRPr lang="en-US" sz="1400" b="0" u="none" strike="noStrike">
+              <a:solidFill>
+                <a:srgbClr val="000000"/>
               </a:solidFill>
               <a:effectLst/>
               <a:uFillTx/>
@@ -1179,7 +1961,7 @@
       </p:sp>
       <p:sp>
         <p:nvSpPr>
-          <p:cNvPr id="3" name="PlaceHolder 4"/>
+          <p:cNvPr id="5" name="PlaceHolder 4"/>
           <p:cNvSpPr>
             <a:spLocks noGrp="1"/>
           </p:cNvSpPr>
@@ -1201,15 +1983,15 @@
           </a:ln>
         </p:spPr>
         <p:txBody>
-          <a:bodyPr lIns="0" rIns="0" tIns="0" bIns="0" anchor="t">
+          <a:bodyPr lIns="0" tIns="0" rIns="0" bIns="0" anchor="t">
             <a:noAutofit/>
           </a:bodyPr>
           <a:lstStyle>
             <a:lvl1pPr indent="0" algn="ctr">
               <a:buNone/>
-              <a:defRPr b="0" lang="en-GB" sz="1400" strike="noStrike" u="none">
-                <a:solidFill>
-                  <a:srgbClr val="ffffff"/>
+              <a:defRPr lang="en-US" sz="1400" b="0" u="none" strike="noStrike">
+                <a:solidFill>
+                  <a:srgbClr val="000000"/>
                 </a:solidFill>
                 <a:effectLst/>
                 <a:uFillTx/>
@@ -1222,9 +2004,9 @@
               <a:buNone/>
             </a:pPr>
             <a:r>
-              <a:rPr b="0" lang="en-GB" sz="1400" strike="noStrike" u="none">
-                <a:solidFill>
-                  <a:srgbClr val="ffffff"/>
+              <a:rPr lang="en-US" sz="1400" b="0" u="none" strike="noStrike">
+                <a:solidFill>
+                  <a:srgbClr val="000000"/>
                 </a:solidFill>
                 <a:effectLst/>
                 <a:uFillTx/>
@@ -1232,9 +2014,9 @@
               </a:rPr>
               <a:t>&lt;footer&gt;</a:t>
             </a:r>
-            <a:endParaRPr b="0" lang="en-GB" sz="1400" strike="noStrike" u="none">
-              <a:solidFill>
-                <a:srgbClr val="ffffff"/>
+            <a:endParaRPr lang="en-US" sz="1400" b="0" u="none" strike="noStrike">
+              <a:solidFill>
+                <a:srgbClr val="000000"/>
               </a:solidFill>
               <a:effectLst/>
               <a:uFillTx/>
@@ -1245,7 +2027,7 @@
       </p:sp>
       <p:sp>
         <p:nvSpPr>
-          <p:cNvPr id="4" name="PlaceHolder 5"/>
+          <p:cNvPr id="6" name="PlaceHolder 5"/>
           <p:cNvSpPr>
             <a:spLocks noGrp="1"/>
           </p:cNvSpPr>
@@ -1267,15 +2049,15 @@
           </a:ln>
         </p:spPr>
         <p:txBody>
-          <a:bodyPr lIns="0" rIns="0" tIns="0" bIns="0" anchor="t">
+          <a:bodyPr lIns="0" tIns="0" rIns="0" bIns="0" anchor="t">
             <a:noAutofit/>
           </a:bodyPr>
           <a:lstStyle>
             <a:lvl1pPr indent="0" algn="r">
               <a:buNone/>
-              <a:defRPr b="0" lang="en-GB" sz="1400" strike="noStrike" u="none">
-                <a:solidFill>
-                  <a:srgbClr val="ffffff"/>
+              <a:defRPr lang="en-US" sz="1400" b="0" u="none" strike="noStrike">
+                <a:solidFill>
+                  <a:srgbClr val="000000"/>
                 </a:solidFill>
                 <a:effectLst/>
                 <a:uFillTx/>
@@ -1287,10 +2069,10 @@
             <a:pPr indent="0" algn="r">
               <a:buNone/>
             </a:pPr>
-            <a:fld id="{07E6126E-AE0F-4CD0-BECB-A818E4E0CD1D}" type="slidenum">
-              <a:rPr b="0" lang="en-GB" sz="1400" strike="noStrike" u="none">
-                <a:solidFill>
-                  <a:srgbClr val="ffffff"/>
+            <a:fld id="{E842F206-F0AF-43E1-A438-6BFF7BFFF14F}" type="slidenum">
+              <a:rPr lang="en-US" sz="1400" b="0" u="none" strike="noStrike">
+                <a:solidFill>
+                  <a:srgbClr val="000000"/>
                 </a:solidFill>
                 <a:effectLst/>
                 <a:uFillTx/>
@@ -1298,9 +2080,9 @@
               </a:rPr>
               <a:t>&lt;number&gt;</a:t>
             </a:fld>
-            <a:endParaRPr b="0" lang="en-GB" sz="1400" strike="noStrike" u="none">
-              <a:solidFill>
-                <a:srgbClr val="ffffff"/>
+            <a:endParaRPr lang="en-US" sz="1400" b="0" u="none" strike="noStrike">
+              <a:solidFill>
+                <a:srgbClr val="000000"/>
               </a:solidFill>
               <a:effectLst/>
               <a:uFillTx/>
@@ -1338,7 +2120,7 @@
       </p:grpSpPr>
       <p:sp>
         <p:nvSpPr>
-          <p:cNvPr id="13" name=""/>
+          <p:cNvPr id="15" name=""/>
           <p:cNvSpPr txBox="1"/>
           <p:nvPr/>
         </p:nvSpPr>
@@ -1351,33 +2133,38 @@
             <a:avLst/>
           </a:prstGeom>
           <a:solidFill>
-            <a:srgbClr val="729fcf"/>
+            <a:schemeClr val="accent1"/>
           </a:solidFill>
-          <a:ln w="0">
+          <a:ln w="38160">
             <a:solidFill>
-              <a:srgbClr val="3465a4"/>
+              <a:schemeClr val="accent1">
+                <a:lumMod val="75000"/>
+                <a:lumOff val="0"/>
+              </a:schemeClr>
             </a:solidFill>
+            <a:round/>
           </a:ln>
         </p:spPr>
         <p:txBody>
-          <a:bodyPr lIns="90000" rIns="90000" tIns="45000" bIns="45000" anchor="t">
+          <a:bodyPr lIns="90000" tIns="45000" rIns="90000" bIns="45000" anchor="t">
             <a:spAutoFit/>
           </a:bodyPr>
           <a:p>
-            <a:r>
-              <a:rPr b="0" lang="en-GB" sz="1800" strike="noStrike" u="none">
-                <a:solidFill>
-                  <a:srgbClr val="000000"/>
-                </a:solidFill>
-                <a:effectLst/>
-                <a:uFillTx/>
-                <a:latin typeface="Arial"/>
-              </a:rPr>
-              <a:t>Deck Title Slide</a:t>
-            </a:r>
-            <a:endParaRPr b="0" lang="en-GB" sz="1800" strike="noStrike" u="none">
-              <a:solidFill>
-                <a:srgbClr val="000000"/>
+            <a:pPr/>
+            <a:r>
+              <a:rPr lang="en-US" sz="1800" b="0" u="none" strike="noStrike">
+                <a:solidFill>
+                  <a:srgbClr val="FFFFFF"/>
+                </a:solidFill>
+                <a:effectLst/>
+                <a:uFillTx/>
+                <a:latin typeface="Arial"/>
+              </a:rPr>
+              <a:t>Slide 1: Intro</a:t>
+            </a:r>
+            <a:endParaRPr lang="en-US" sz="1800" b="0" u="none" strike="noStrike">
+              <a:solidFill>
+                <a:srgbClr val="FFFFFF"/>
               </a:solidFill>
               <a:effectLst/>
               <a:uFillTx/>
@@ -1388,7 +2175,7 @@
       </p:sp>
       <p:sp>
         <p:nvSpPr>
-          <p:cNvPr id="14" name=""/>
+          <p:cNvPr id="16" name=""/>
           <p:cNvSpPr txBox="1"/>
           <p:nvPr/>
         </p:nvSpPr>
@@ -1401,31 +2188,35 @@
             <a:avLst/>
           </a:prstGeom>
           <a:solidFill>
-            <a:srgbClr val="729fcf"/>
+            <a:schemeClr val="accent1"/>
           </a:solidFill>
-          <a:ln w="0">
+          <a:ln w="38160">
             <a:solidFill>
-              <a:srgbClr val="3465a4"/>
+              <a:schemeClr val="accent1">
+                <a:lumMod val="75000"/>
+                <a:lumOff val="0"/>
+              </a:schemeClr>
             </a:solidFill>
+            <a:round/>
           </a:ln>
         </p:spPr>
         <p:txBody>
-          <a:bodyPr lIns="90000" rIns="90000" tIns="45000" bIns="45000" anchor="t">
+          <a:bodyPr lIns="90000" tIns="45000" rIns="90000" bIns="45000" anchor="t">
             <a:spAutoFit/>
           </a:bodyPr>
           <a:p>
             <a:pPr marL="216000" indent="-216000">
               <a:buClr>
-                <a:srgbClr val="ffffff"/>
+                <a:srgbClr val="000000"/>
               </a:buClr>
               <a:buSzPct val="45000"/>
-              <a:buFont typeface="StarBats" charset="2"/>
+              <a:buFont typeface="starbats" charset="2"/>
               <a:buChar char=""/>
             </a:pPr>
             <a:r>
-              <a:rPr b="0" lang="en-GB" sz="1800" strike="noStrike" u="none">
-                <a:solidFill>
-                  <a:srgbClr val="000000"/>
+              <a:rPr lang="en-US" sz="1800" b="0" u="none" strike="noStrike">
+                <a:solidFill>
+                  <a:srgbClr val="FFFFFF"/>
                 </a:solidFill>
                 <a:effectLst/>
                 <a:uFillTx/>
@@ -1433,28 +2224,28 @@
               </a:rPr>
               <a:t>Top level point</a:t>
             </a:r>
-            <a:endParaRPr b="0" lang="en-GB" sz="1800" strike="noStrike" u="none">
-              <a:solidFill>
+            <a:endParaRPr lang="en-US" sz="1800" b="0" u="none" strike="noStrike">
+              <a:solidFill>
+                <a:srgbClr val="FFFFFF"/>
+              </a:solidFill>
+              <a:effectLst/>
+              <a:uFillTx/>
+              <a:latin typeface="Arial"/>
+            </a:endParaRPr>
+          </a:p>
+          <a:p>
+            <a:pPr marL="432000" lvl="1" indent="-216000">
+              <a:buClr>
                 <a:srgbClr val="000000"/>
-              </a:solidFill>
-              <a:effectLst/>
-              <a:uFillTx/>
-              <a:latin typeface="Arial"/>
-            </a:endParaRPr>
-          </a:p>
-          <a:p>
-            <a:pPr lvl="1" marL="432000" indent="-216000">
-              <a:buClr>
-                <a:srgbClr val="ffffff"/>
               </a:buClr>
               <a:buSzPct val="45000"/>
-              <a:buFont typeface="StarBats" charset="2"/>
+              <a:buFont typeface="starbats" charset="2"/>
               <a:buChar char=""/>
             </a:pPr>
             <a:r>
-              <a:rPr b="0" lang="en-GB" sz="1800" strike="noStrike" u="none">
-                <a:solidFill>
-                  <a:srgbClr val="000000"/>
+              <a:rPr lang="en-US" sz="1800" b="0" u="none" strike="noStrike">
+                <a:solidFill>
+                  <a:srgbClr val="FFFFFF"/>
                 </a:solidFill>
                 <a:effectLst/>
                 <a:uFillTx/>
@@ -1462,9 +2253,9 @@
               </a:rPr>
               <a:t>Nested detail</a:t>
             </a:r>
-            <a:endParaRPr b="0" lang="en-GB" sz="1800" strike="noStrike" u="none">
-              <a:solidFill>
-                <a:srgbClr val="000000"/>
+            <a:endParaRPr lang="en-US" sz="1800" b="0" u="none" strike="noStrike">
+              <a:solidFill>
+                <a:srgbClr val="FFFFFF"/>
               </a:solidFill>
               <a:effectLst/>
               <a:uFillTx/>
@@ -1474,16 +2265,16 @@
           <a:p>
             <a:pPr marL="216000" indent="-216000">
               <a:buClr>
-                <a:srgbClr val="ffffff"/>
+                <a:srgbClr val="000000"/>
               </a:buClr>
               <a:buSzPct val="45000"/>
-              <a:buFont typeface="StarBats" charset="2"/>
+              <a:buFont typeface="starbats" charset="2"/>
               <a:buChar char=""/>
             </a:pPr>
             <a:r>
-              <a:rPr b="0" lang="en-GB" sz="1800" strike="noStrike" u="none">
-                <a:solidFill>
-                  <a:srgbClr val="000000"/>
+              <a:rPr lang="en-US" sz="1800" b="0" u="none" strike="noStrike">
+                <a:solidFill>
+                  <a:srgbClr val="FFFFFF"/>
                 </a:solidFill>
                 <a:effectLst/>
                 <a:uFillTx/>
@@ -1491,9 +2282,9 @@
               </a:rPr>
               <a:t>Second point with emphasis</a:t>
             </a:r>
-            <a:endParaRPr b="0" lang="en-GB" sz="1800" strike="noStrike" u="none">
-              <a:solidFill>
-                <a:srgbClr val="000000"/>
+            <a:endParaRPr lang="en-US" sz="1800" b="0" u="none" strike="noStrike">
+              <a:solidFill>
+                <a:srgbClr val="FFFFFF"/>
               </a:solidFill>
               <a:effectLst/>
               <a:uFillTx/>
@@ -1502,6 +2293,426 @@
           </a:p>
         </p:txBody>
       </p:sp>
+    </p:spTree>
+  </p:cSld>
+  <mc:AlternateContent>
+    <mc:Choice Requires="p14">
+      <p:transition spd="slow" p14:dur="2000"/>
+    </mc:Choice>
+    <mc:Fallback>
+      <p:transition spd="slow"/>
+    </mc:Fallback>
+  </mc:AlternateContent>
+</p:sld>
+</file>
+
+<file path=ppt/slides/slide10.xml><?xml version="1.0" encoding="utf-8"?>
+<p:sld xmlns:a="http://schemas.openxmlformats.org/drawingml/2006/main" xmlns:p="http://schemas.openxmlformats.org/presentationml/2006/main" xmlns:r="http://schemas.openxmlformats.org/officeDocument/2006/relationships" xmlns:p14="http://schemas.microsoft.com/office/powerpoint/2010/main" xmlns:p15="http://schemas.microsoft.com/office/powerpoint/2012/main" xmlns:mc="http://schemas.openxmlformats.org/markup-compatibility/2006">
+  <p:cSld>
+    <p:spTree>
+      <p:nvGrpSpPr>
+        <p:cNvPr id="1" name=""/>
+        <p:cNvGrpSpPr/>
+        <p:nvPr/>
+      </p:nvGrpSpPr>
+      <p:grpSpPr>
+        <a:xfrm>
+          <a:off x="0" y="0"/>
+          <a:ext cx="0" cy="0"/>
+          <a:chOff x="0" y="0"/>
+          <a:chExt cx="0" cy="0"/>
+        </a:xfrm>
+      </p:grpSpPr>
+      <p:sp>
+        <p:nvSpPr>
+          <p:cNvPr id="45" name=""/>
+          <p:cNvSpPr txBox="1"/>
+          <p:nvPr/>
+        </p:nvSpPr>
+        <p:spPr>
+          <a:xfrm>
+            <a:off x="720000" y="360000"/>
+            <a:ext cx="8640000" cy="1080000"/>
+          </a:xfrm>
+          <a:prstGeom prst="rect">
+            <a:avLst/>
+          </a:prstGeom>
+          <a:solidFill>
+            <a:schemeClr val="accent1"/>
+          </a:solidFill>
+          <a:ln w="38160">
+            <a:solidFill>
+              <a:schemeClr val="accent1">
+                <a:lumMod val="75000"/>
+                <a:lumOff val="0"/>
+              </a:schemeClr>
+            </a:solidFill>
+            <a:round/>
+          </a:ln>
+        </p:spPr>
+        <p:txBody>
+          <a:bodyPr lIns="90000" tIns="45000" rIns="90000" bIns="45000" anchor="t">
+            <a:spAutoFit/>
+          </a:bodyPr>
+          <a:p>
+            <a:pPr/>
+            <a:r>
+              <a:rPr lang="en-US" sz="1800" b="0" u="none" strike="noStrike">
+                <a:solidFill>
+                  <a:srgbClr val="FFFFFF"/>
+                </a:solidFill>
+                <a:effectLst/>
+                <a:uFillTx/>
+                <a:latin typeface="Arial"/>
+              </a:rPr>
+              <a:t>Slide 10: Summary</a:t>
+            </a:r>
+            <a:endParaRPr lang="en-US" sz="1800" b="0" u="none" strike="noStrike">
+              <a:solidFill>
+                <a:srgbClr val="FFFFFF"/>
+              </a:solidFill>
+              <a:effectLst/>
+              <a:uFillTx/>
+              <a:latin typeface="Arial"/>
+            </a:endParaRPr>
+          </a:p>
+        </p:txBody>
+      </p:sp>
+      <p:graphicFrame>
+        <p:nvGraphicFramePr>
+          <p:cNvPr id="46" name=""/>
+          <p:cNvGraphicFramePr/>
+          <p:nvPr/>
+        </p:nvGraphicFramePr>
+        <p:xfrm>
+          <a:off x="720000" y="1800000"/>
+          <a:ext cx="7200000" cy="2880000"/>
+        </p:xfrm>
+        <a:graphic>
+          <a:graphicData uri="http://schemas.openxmlformats.org/drawingml/2006/table">
+            <a:tbl>
+              <a:tblPr/>
+              <a:tblGrid>
+                <a:gridCol w="3600000"/>
+                <a:gridCol w="3600000"/>
+              </a:tblGrid>
+              <a:tr h="1440000">
+                <a:tc>
+                  <a:txBody>
+                    <a:bodyPr lIns="90000" tIns="45000" rIns="90000" bIns="45000" anchor="t">
+                      <a:noAutofit/>
+                    </a:bodyPr>
+                    <a:p>
+                      <a:pPr/>
+                      <a:r>
+                        <a:rPr lang="en-US" sz="1800" b="0" u="none" strike="noStrike">
+                          <a:solidFill>
+                            <a:srgbClr val="FFFFFF"/>
+                          </a:solidFill>
+                          <a:effectLst/>
+                          <a:uFillTx/>
+                          <a:latin typeface="Arial"/>
+                        </a:rPr>
+                        <a:t>Region</a:t>
+                      </a:r>
+                      <a:endParaRPr lang="en-US" sz="1800" b="0" u="none" strike="noStrike">
+                        <a:solidFill>
+                          <a:srgbClr val="FFFFFF"/>
+                        </a:solidFill>
+                        <a:effectLst/>
+                        <a:uFillTx/>
+                        <a:latin typeface="Arial"/>
+                      </a:endParaRPr>
+                    </a:p>
+                  </a:txBody>
+                  <a:tcPr anchor="t" marL="90000" marR="90000" marT="45000" marB="45000">
+                    <a:lnL>
+                      <a:noFill/>
+                    </a:lnL>
+                    <a:lnR>
+                      <a:noFill/>
+                    </a:lnR>
+                    <a:lnT>
+                      <a:noFill/>
+                    </a:lnT>
+                    <a:lnB>
+                      <a:noFill/>
+                    </a:lnB>
+                    <a:solidFill>
+                      <a:schemeClr val="accent1"/>
+                    </a:solidFill>
+                  </a:tcPr>
+                </a:tc>
+                <a:tc>
+                  <a:txBody>
+                    <a:bodyPr lIns="90000" tIns="45000" rIns="90000" bIns="45000" anchor="t">
+                      <a:noAutofit/>
+                    </a:bodyPr>
+                    <a:p>
+                      <a:pPr/>
+                      <a:r>
+                        <a:rPr lang="en-US" sz="1800" b="0" u="none" strike="noStrike">
+                          <a:solidFill>
+                            <a:srgbClr val="FFFFFF"/>
+                          </a:solidFill>
+                          <a:effectLst/>
+                          <a:uFillTx/>
+                          <a:latin typeface="Arial"/>
+                        </a:rPr>
+                        <a:t>Total</a:t>
+                      </a:r>
+                      <a:endParaRPr lang="en-US" sz="1800" b="0" u="none" strike="noStrike">
+                        <a:solidFill>
+                          <a:srgbClr val="FFFFFF"/>
+                        </a:solidFill>
+                        <a:effectLst/>
+                        <a:uFillTx/>
+                        <a:latin typeface="Arial"/>
+                      </a:endParaRPr>
+                    </a:p>
+                  </a:txBody>
+                  <a:tcPr anchor="t" marL="90000" marR="90000" marT="45000" marB="45000">
+                    <a:lnL>
+                      <a:noFill/>
+                    </a:lnL>
+                    <a:lnR>
+                      <a:noFill/>
+                    </a:lnR>
+                    <a:lnT>
+                      <a:noFill/>
+                    </a:lnT>
+                    <a:lnB>
+                      <a:noFill/>
+                    </a:lnB>
+                    <a:solidFill>
+                      <a:schemeClr val="accent1"/>
+                    </a:solidFill>
+                  </a:tcPr>
+                </a:tc>
+              </a:tr>
+              <a:tr h="1440000">
+                <a:tc>
+                  <a:txBody>
+                    <a:bodyPr lIns="90000" tIns="45000" rIns="90000" bIns="45000" anchor="t">
+                      <a:noAutofit/>
+                    </a:bodyPr>
+                    <a:p>
+                      <a:pPr/>
+                      <a:r>
+                        <a:rPr lang="en-US" sz="1800" b="0" u="none" strike="noStrike">
+                          <a:solidFill>
+                            <a:srgbClr val="FFFFFF"/>
+                          </a:solidFill>
+                          <a:effectLst/>
+                          <a:uFillTx/>
+                          <a:latin typeface="Arial"/>
+                        </a:rPr>
+                        <a:t>North</a:t>
+                      </a:r>
+                      <a:endParaRPr lang="en-US" sz="1800" b="0" u="none" strike="noStrike">
+                        <a:solidFill>
+                          <a:srgbClr val="FFFFFF"/>
+                        </a:solidFill>
+                        <a:effectLst/>
+                        <a:uFillTx/>
+                        <a:latin typeface="Arial"/>
+                      </a:endParaRPr>
+                    </a:p>
+                  </a:txBody>
+                  <a:tcPr anchor="t" marL="90000" marR="90000" marT="45000" marB="45000">
+                    <a:lnL>
+                      <a:noFill/>
+                    </a:lnL>
+                    <a:lnR>
+                      <a:noFill/>
+                    </a:lnR>
+                    <a:lnT>
+                      <a:noFill/>
+                    </a:lnT>
+                    <a:lnB>
+                      <a:noFill/>
+                    </a:lnB>
+                    <a:solidFill>
+                      <a:schemeClr val="accent1"/>
+                    </a:solidFill>
+                  </a:tcPr>
+                </a:tc>
+                <a:tc>
+                  <a:txBody>
+                    <a:bodyPr lIns="90000" tIns="45000" rIns="90000" bIns="45000" anchor="t">
+                      <a:noAutofit/>
+                    </a:bodyPr>
+                    <a:p>
+                      <a:pPr/>
+                      <a:r>
+                        <a:rPr lang="en-US" sz="1800" b="0" u="none" strike="noStrike">
+                          <a:solidFill>
+                            <a:srgbClr val="FFFFFF"/>
+                          </a:solidFill>
+                          <a:effectLst/>
+                          <a:uFillTx/>
+                          <a:latin typeface="Arial"/>
+                        </a:rPr>
+                        <a:t>42</a:t>
+                      </a:r>
+                      <a:endParaRPr lang="en-US" sz="1800" b="0" u="none" strike="noStrike">
+                        <a:solidFill>
+                          <a:srgbClr val="FFFFFF"/>
+                        </a:solidFill>
+                        <a:effectLst/>
+                        <a:uFillTx/>
+                        <a:latin typeface="Arial"/>
+                      </a:endParaRPr>
+                    </a:p>
+                  </a:txBody>
+                  <a:tcPr anchor="t" marL="90000" marR="90000" marT="45000" marB="45000">
+                    <a:lnL>
+                      <a:noFill/>
+                    </a:lnL>
+                    <a:lnR>
+                      <a:noFill/>
+                    </a:lnR>
+                    <a:lnT>
+                      <a:noFill/>
+                    </a:lnT>
+                    <a:lnB>
+                      <a:noFill/>
+                    </a:lnB>
+                    <a:solidFill>
+                      <a:schemeClr val="accent1"/>
+                    </a:solidFill>
+                  </a:tcPr>
+                </a:tc>
+              </a:tr>
+            </a:tbl>
+          </a:graphicData>
+        </a:graphic>
+      </p:graphicFrame>
+      <p:sp>
+        <p:nvSpPr>
+          <p:cNvPr id="47" name=""/>
+          <p:cNvSpPr txBox="1"/>
+          <p:nvPr/>
+        </p:nvSpPr>
+        <p:spPr>
+          <a:xfrm>
+            <a:off x="720000" y="5040000"/>
+            <a:ext cx="7200000" cy="1440000"/>
+          </a:xfrm>
+          <a:prstGeom prst="rect">
+            <a:avLst/>
+          </a:prstGeom>
+          <a:solidFill>
+            <a:schemeClr val="accent1"/>
+          </a:solidFill>
+          <a:ln w="38160">
+            <a:solidFill>
+              <a:schemeClr val="accent1">
+                <a:lumMod val="75000"/>
+                <a:lumOff val="0"/>
+              </a:schemeClr>
+            </a:solidFill>
+            <a:round/>
+          </a:ln>
+        </p:spPr>
+        <p:txBody>
+          <a:bodyPr lIns="90000" tIns="45000" rIns="90000" bIns="45000" anchor="t">
+            <a:spAutoFit/>
+          </a:bodyPr>
+          <a:p>
+            <a:pPr/>
+            <a:r>
+              <a:rPr lang="en-US" sz="1800" b="0" u="none" strike="noStrike">
+                <a:solidFill>
+                  <a:srgbClr val="FFFFFF"/>
+                </a:solidFill>
+                <a:effectLst/>
+                <a:uFillTx/>
+                <a:latin typeface="Arial"/>
+              </a:rPr>
+              <a:t>Grouped shapes below.</a:t>
+            </a:r>
+            <a:endParaRPr lang="en-US" sz="1800" b="0" u="none" strike="noStrike">
+              <a:solidFill>
+                <a:srgbClr val="FFFFFF"/>
+              </a:solidFill>
+              <a:effectLst/>
+              <a:uFillTx/>
+              <a:latin typeface="Arial"/>
+            </a:endParaRPr>
+          </a:p>
+        </p:txBody>
+      </p:sp>
+      <p:grpSp>
+        <p:nvGrpSpPr>
+          <p:cNvPr id="48" name="Group10"/>
+          <p:cNvGrpSpPr/>
+          <p:nvPr/>
+        </p:nvGrpSpPr>
+        <p:grpSpPr>
+          <a:xfrm>
+            <a:off x="720000" y="6480000"/>
+            <a:ext cx="2880000" cy="720000"/>
+            <a:chOff x="720000" y="6480000"/>
+            <a:chExt cx="2880000" cy="720000"/>
+          </a:xfrm>
+        </p:grpSpPr>
+        <p:sp>
+          <p:nvSpPr>
+            <p:cNvPr id="49" name=""/>
+            <p:cNvSpPr txBox="1"/>
+            <p:nvPr/>
+          </p:nvSpPr>
+          <p:spPr>
+            <a:xfrm>
+              <a:off x="720000" y="6480000"/>
+              <a:ext cx="2880000" cy="720000"/>
+            </a:xfrm>
+            <a:prstGeom prst="rect">
+              <a:avLst/>
+            </a:prstGeom>
+            <a:solidFill>
+              <a:schemeClr val="accent1"/>
+            </a:solidFill>
+            <a:ln w="38160">
+              <a:solidFill>
+                <a:schemeClr val="accent1">
+                  <a:lumMod val="75000"/>
+                  <a:lumOff val="0"/>
+                </a:schemeClr>
+              </a:solidFill>
+              <a:round/>
+            </a:ln>
+          </p:spPr>
+          <p:txBody>
+            <a:bodyPr lIns="90000" tIns="45000" rIns="90000" bIns="45000" anchor="t">
+              <a:spAutoFit/>
+            </a:bodyPr>
+            <a:p>
+              <a:pPr/>
+              <a:r>
+                <a:rPr lang="en-US" sz="1800" b="0" u="none" strike="noStrike">
+                  <a:solidFill>
+                    <a:srgbClr val="FFFFFF"/>
+                  </a:solidFill>
+                  <a:effectLst/>
+                  <a:uFillTx/>
+                  <a:latin typeface="Arial"/>
+                </a:rPr>
+                <a:t>Inside a group shape.</a:t>
+              </a:r>
+              <a:endParaRPr lang="en-US" sz="1800" b="0" u="none" strike="noStrike">
+                <a:solidFill>
+                  <a:srgbClr val="FFFFFF"/>
+                </a:solidFill>
+                <a:effectLst/>
+                <a:uFillTx/>
+                <a:latin typeface="Arial"/>
+              </a:endParaRPr>
+            </a:p>
+          </p:txBody>
+        </p:sp>
+      </p:grpSp>
     </p:spTree>
   </p:cSld>
   <mc:AlternateContent>
@@ -1534,7 +2745,7 @@
       </p:grpSpPr>
       <p:sp>
         <p:nvSpPr>
-          <p:cNvPr id="15" name=""/>
+          <p:cNvPr id="17" name=""/>
           <p:cNvSpPr txBox="1"/>
           <p:nvPr/>
         </p:nvSpPr>
@@ -1547,33 +2758,38 @@
             <a:avLst/>
           </a:prstGeom>
           <a:solidFill>
-            <a:srgbClr val="729fcf"/>
+            <a:schemeClr val="accent1"/>
           </a:solidFill>
-          <a:ln w="0">
+          <a:ln w="38160">
             <a:solidFill>
-              <a:srgbClr val="3465a4"/>
+              <a:schemeClr val="accent1">
+                <a:lumMod val="75000"/>
+                <a:lumOff val="0"/>
+              </a:schemeClr>
             </a:solidFill>
+            <a:round/>
           </a:ln>
         </p:spPr>
         <p:txBody>
-          <a:bodyPr lIns="90000" rIns="90000" tIns="45000" bIns="45000" anchor="t">
+          <a:bodyPr lIns="90000" tIns="45000" rIns="90000" bIns="45000" anchor="t">
             <a:spAutoFit/>
           </a:bodyPr>
           <a:p>
-            <a:r>
-              <a:rPr b="0" lang="en-GB" sz="1800" strike="noStrike" u="none">
-                <a:solidFill>
-                  <a:srgbClr val="000000"/>
-                </a:solidFill>
-                <a:effectLst/>
-                <a:uFillTx/>
-                <a:latin typeface="Arial"/>
-              </a:rPr>
-              <a:t>Numbers Slide</a:t>
-            </a:r>
-            <a:endParaRPr b="0" lang="en-GB" sz="1800" strike="noStrike" u="none">
-              <a:solidFill>
-                <a:srgbClr val="000000"/>
+            <a:pPr/>
+            <a:r>
+              <a:rPr lang="en-US" sz="1800" b="0" u="none" strike="noStrike">
+                <a:solidFill>
+                  <a:srgbClr val="FFFFFF"/>
+                </a:solidFill>
+                <a:effectLst/>
+                <a:uFillTx/>
+                <a:latin typeface="Arial"/>
+              </a:rPr>
+              <a:t>Slide 2: Data</a:t>
+            </a:r>
+            <a:endParaRPr lang="en-US" sz="1800" b="0" u="none" strike="noStrike">
+              <a:solidFill>
+                <a:srgbClr val="FFFFFF"/>
               </a:solidFill>
               <a:effectLst/>
               <a:uFillTx/>
@@ -1584,7 +2800,7 @@
       </p:sp>
       <p:graphicFrame>
         <p:nvGraphicFramePr>
-          <p:cNvPr id="16" name=""/>
+          <p:cNvPr id="18" name=""/>
           <p:cNvGraphicFramePr/>
           <p:nvPr/>
         </p:nvGraphicFramePr>
@@ -1603,14 +2819,15 @@
               <a:tr h="1440000">
                 <a:tc>
                   <a:txBody>
-                    <a:bodyPr lIns="90000" rIns="90000" tIns="45000" bIns="45000" anchor="t">
+                    <a:bodyPr lIns="90000" tIns="45000" rIns="90000" bIns="45000" anchor="t">
                       <a:noAutofit/>
                     </a:bodyPr>
                     <a:p>
+                      <a:pPr/>
                       <a:r>
-                        <a:rPr b="0" lang="en-GB" sz="1800" strike="noStrike" u="none">
+                        <a:rPr lang="en-US" sz="1800" b="0" u="none" strike="noStrike">
                           <a:solidFill>
-                            <a:srgbClr val="000000"/>
+                            <a:srgbClr val="FFFFFF"/>
                           </a:solidFill>
                           <a:effectLst/>
                           <a:uFillTx/>
@@ -1618,9 +2835,9 @@
                         </a:rPr>
                         <a:t>Region</a:t>
                       </a:r>
-                      <a:endParaRPr b="0" lang="en-GB" sz="1800" strike="noStrike" u="none">
+                      <a:endParaRPr lang="en-US" sz="1800" b="0" u="none" strike="noStrike">
                         <a:solidFill>
-                          <a:srgbClr val="000000"/>
+                          <a:srgbClr val="FFFFFF"/>
                         </a:solidFill>
                         <a:effectLst/>
                         <a:uFillTx/>
@@ -1628,7 +2845,7 @@
                       </a:endParaRPr>
                     </a:p>
                   </a:txBody>
-                  <a:tcPr anchor="t" marL="90000" marR="90000">
+                  <a:tcPr anchor="t" marL="90000" marR="90000" marT="45000" marB="45000">
                     <a:lnL>
                       <a:noFill/>
                     </a:lnL>
@@ -1642,20 +2859,21 @@
                       <a:noFill/>
                     </a:lnB>
                     <a:solidFill>
-                      <a:srgbClr val="729fcf"/>
+                      <a:schemeClr val="accent1"/>
                     </a:solidFill>
                   </a:tcPr>
                 </a:tc>
                 <a:tc>
                   <a:txBody>
-                    <a:bodyPr lIns="90000" rIns="90000" tIns="45000" bIns="45000" anchor="t">
+                    <a:bodyPr lIns="90000" tIns="45000" rIns="90000" bIns="45000" anchor="t">
                       <a:noAutofit/>
                     </a:bodyPr>
                     <a:p>
+                      <a:pPr/>
                       <a:r>
-                        <a:rPr b="0" lang="en-GB" sz="1800" strike="noStrike" u="none">
+                        <a:rPr lang="en-US" sz="1800" b="0" u="none" strike="noStrike">
                           <a:solidFill>
-                            <a:srgbClr val="000000"/>
+                            <a:srgbClr val="FFFFFF"/>
                           </a:solidFill>
                           <a:effectLst/>
                           <a:uFillTx/>
@@ -1663,9 +2881,9 @@
                         </a:rPr>
                         <a:t>Total</a:t>
                       </a:r>
-                      <a:endParaRPr b="0" lang="en-GB" sz="1800" strike="noStrike" u="none">
+                      <a:endParaRPr lang="en-US" sz="1800" b="0" u="none" strike="noStrike">
                         <a:solidFill>
-                          <a:srgbClr val="000000"/>
+                          <a:srgbClr val="FFFFFF"/>
                         </a:solidFill>
                         <a:effectLst/>
                         <a:uFillTx/>
@@ -1673,7 +2891,7 @@
                       </a:endParaRPr>
                     </a:p>
                   </a:txBody>
-                  <a:tcPr anchor="t" marL="90000" marR="90000">
+                  <a:tcPr anchor="t" marL="90000" marR="90000" marT="45000" marB="45000">
                     <a:lnL>
                       <a:noFill/>
                     </a:lnL>
@@ -1687,7 +2905,7 @@
                       <a:noFill/>
                     </a:lnB>
                     <a:solidFill>
-                      <a:srgbClr val="729fcf"/>
+                      <a:schemeClr val="accent1"/>
                     </a:solidFill>
                   </a:tcPr>
                 </a:tc>
@@ -1695,14 +2913,15 @@
               <a:tr h="1440000">
                 <a:tc>
                   <a:txBody>
-                    <a:bodyPr lIns="90000" rIns="90000" tIns="45000" bIns="45000" anchor="t">
+                    <a:bodyPr lIns="90000" tIns="45000" rIns="90000" bIns="45000" anchor="t">
                       <a:noAutofit/>
                     </a:bodyPr>
                     <a:p>
+                      <a:pPr/>
                       <a:r>
-                        <a:rPr b="0" lang="en-GB" sz="1800" strike="noStrike" u="none">
+                        <a:rPr lang="en-US" sz="1800" b="0" u="none" strike="noStrike">
                           <a:solidFill>
-                            <a:srgbClr val="000000"/>
+                            <a:srgbClr val="FFFFFF"/>
                           </a:solidFill>
                           <a:effectLst/>
                           <a:uFillTx/>
@@ -1710,9 +2929,9 @@
                         </a:rPr>
                         <a:t>North</a:t>
                       </a:r>
-                      <a:endParaRPr b="0" lang="en-GB" sz="1800" strike="noStrike" u="none">
+                      <a:endParaRPr lang="en-US" sz="1800" b="0" u="none" strike="noStrike">
                         <a:solidFill>
-                          <a:srgbClr val="000000"/>
+                          <a:srgbClr val="FFFFFF"/>
                         </a:solidFill>
                         <a:effectLst/>
                         <a:uFillTx/>
@@ -1720,7 +2939,7 @@
                       </a:endParaRPr>
                     </a:p>
                   </a:txBody>
-                  <a:tcPr anchor="t" marL="90000" marR="90000">
+                  <a:tcPr anchor="t" marL="90000" marR="90000" marT="45000" marB="45000">
                     <a:lnL>
                       <a:noFill/>
                     </a:lnL>
@@ -1734,20 +2953,21 @@
                       <a:noFill/>
                     </a:lnB>
                     <a:solidFill>
-                      <a:srgbClr val="729fcf"/>
+                      <a:schemeClr val="accent1"/>
                     </a:solidFill>
                   </a:tcPr>
                 </a:tc>
                 <a:tc>
                   <a:txBody>
-                    <a:bodyPr lIns="90000" rIns="90000" tIns="45000" bIns="45000" anchor="t">
+                    <a:bodyPr lIns="90000" tIns="45000" rIns="90000" bIns="45000" anchor="t">
                       <a:noAutofit/>
                     </a:bodyPr>
                     <a:p>
+                      <a:pPr/>
                       <a:r>
-                        <a:rPr b="0" lang="en-GB" sz="1800" strike="noStrike" u="none">
+                        <a:rPr lang="en-US" sz="1800" b="0" u="none" strike="noStrike">
                           <a:solidFill>
-                            <a:srgbClr val="000000"/>
+                            <a:srgbClr val="FFFFFF"/>
                           </a:solidFill>
                           <a:effectLst/>
                           <a:uFillTx/>
@@ -1755,9 +2975,9 @@
                         </a:rPr>
                         <a:t>42</a:t>
                       </a:r>
-                      <a:endParaRPr b="0" lang="en-GB" sz="1800" strike="noStrike" u="none">
+                      <a:endParaRPr lang="en-US" sz="1800" b="0" u="none" strike="noStrike">
                         <a:solidFill>
-                          <a:srgbClr val="000000"/>
+                          <a:srgbClr val="FFFFFF"/>
                         </a:solidFill>
                         <a:effectLst/>
                         <a:uFillTx/>
@@ -1765,7 +2985,7 @@
                       </a:endParaRPr>
                     </a:p>
                   </a:txBody>
-                  <a:tcPr anchor="t" marL="90000" marR="90000">
+                  <a:tcPr anchor="t" marL="90000" marR="90000" marT="45000" marB="45000">
                     <a:lnL>
                       <a:noFill/>
                     </a:lnL>
@@ -1779,7 +2999,7 @@
                       <a:noFill/>
                     </a:lnB>
                     <a:solidFill>
-                      <a:srgbClr val="729fcf"/>
+                      <a:schemeClr val="accent1"/>
                     </a:solidFill>
                   </a:tcPr>
                 </a:tc>
@@ -1790,7 +3010,7 @@
       </p:graphicFrame>
       <p:sp>
         <p:nvSpPr>
-          <p:cNvPr id="17" name=""/>
+          <p:cNvPr id="19" name=""/>
           <p:cNvSpPr txBox="1"/>
           <p:nvPr/>
         </p:nvSpPr>
@@ -1803,23 +3023,28 @@
             <a:avLst/>
           </a:prstGeom>
           <a:solidFill>
-            <a:srgbClr val="729fcf"/>
+            <a:schemeClr val="accent1"/>
           </a:solidFill>
-          <a:ln w="0">
+          <a:ln w="38160">
             <a:solidFill>
-              <a:srgbClr val="3465a4"/>
+              <a:schemeClr val="accent1">
+                <a:lumMod val="75000"/>
+                <a:lumOff val="0"/>
+              </a:schemeClr>
             </a:solidFill>
+            <a:round/>
           </a:ln>
         </p:spPr>
         <p:txBody>
-          <a:bodyPr lIns="90000" rIns="90000" tIns="45000" bIns="45000" anchor="t">
+          <a:bodyPr lIns="90000" tIns="45000" rIns="90000" bIns="45000" anchor="t">
             <a:spAutoFit/>
           </a:bodyPr>
           <a:p>
-            <a:r>
-              <a:rPr b="0" lang="en-GB" sz="1800" strike="noStrike" u="none">
-                <a:solidFill>
-                  <a:srgbClr val="000000"/>
+            <a:pPr/>
+            <a:r>
+              <a:rPr lang="en-US" sz="1800" b="0" u="none" strike="noStrike">
+                <a:solidFill>
+                  <a:srgbClr val="FFFFFF"/>
                 </a:solidFill>
                 <a:effectLst/>
                 <a:uFillTx/>
@@ -1827,9 +3052,9 @@
               </a:rPr>
               <a:t>Grouped shapes below.</a:t>
             </a:r>
-            <a:endParaRPr b="0" lang="en-GB" sz="1800" strike="noStrike" u="none">
-              <a:solidFill>
-                <a:srgbClr val="000000"/>
+            <a:endParaRPr lang="en-US" sz="1800" b="0" u="none" strike="noStrike">
+              <a:solidFill>
+                <a:srgbClr val="FFFFFF"/>
               </a:solidFill>
               <a:effectLst/>
               <a:uFillTx/>
@@ -1840,7 +3065,7 @@
       </p:sp>
       <p:grpSp>
         <p:nvGrpSpPr>
-          <p:cNvPr id="18" name="Group1"/>
+          <p:cNvPr id="20" name="Group2"/>
           <p:cNvGrpSpPr/>
           <p:nvPr/>
         </p:nvGrpSpPr>
@@ -1854,7 +3079,7 @@
         </p:grpSpPr>
         <p:sp>
           <p:nvSpPr>
-            <p:cNvPr id="19" name=""/>
+            <p:cNvPr id="21" name=""/>
             <p:cNvSpPr txBox="1"/>
             <p:nvPr/>
           </p:nvSpPr>
@@ -1867,23 +3092,28 @@
               <a:avLst/>
             </a:prstGeom>
             <a:solidFill>
-              <a:srgbClr val="729fcf"/>
+              <a:schemeClr val="accent1"/>
             </a:solidFill>
-            <a:ln w="0">
-              <a:solidFill>
-                <a:srgbClr val="3465a4"/>
-              </a:solidFill>
+            <a:ln w="38160">
+              <a:solidFill>
+                <a:schemeClr val="accent1">
+                  <a:lumMod val="75000"/>
+                  <a:lumOff val="0"/>
+                </a:schemeClr>
+              </a:solidFill>
+              <a:round/>
             </a:ln>
           </p:spPr>
           <p:txBody>
-            <a:bodyPr lIns="90000" rIns="90000" tIns="45000" bIns="45000" anchor="t">
+            <a:bodyPr lIns="90000" tIns="45000" rIns="90000" bIns="45000" anchor="t">
               <a:spAutoFit/>
             </a:bodyPr>
             <a:p>
+              <a:pPr/>
               <a:r>
-                <a:rPr b="0" lang="en-GB" sz="1800" strike="noStrike" u="none">
+                <a:rPr lang="en-US" sz="1800" b="0" u="none" strike="noStrike">
                   <a:solidFill>
-                    <a:srgbClr val="000000"/>
+                    <a:srgbClr val="FFFFFF"/>
                   </a:solidFill>
                   <a:effectLst/>
                   <a:uFillTx/>
@@ -1891,9 +3121,9 @@
                 </a:rPr>
                 <a:t>Inside a group shape.</a:t>
               </a:r>
-              <a:endParaRPr b="0" lang="en-GB" sz="1800" strike="noStrike" u="none">
-                <a:solidFill>
-                  <a:srgbClr val="000000"/>
+              <a:endParaRPr lang="en-US" sz="1800" b="0" u="none" strike="noStrike">
+                <a:solidFill>
+                  <a:srgbClr val="FFFFFF"/>
                 </a:solidFill>
                 <a:effectLst/>
                 <a:uFillTx/>
@@ -1903,6 +3133,2086 @@
           </p:txBody>
         </p:sp>
       </p:grpSp>
+    </p:spTree>
+  </p:cSld>
+  <mc:AlternateContent>
+    <mc:Choice Requires="p14">
+      <p:transition spd="slow" p14:dur="2000"/>
+    </mc:Choice>
+    <mc:Fallback>
+      <p:transition spd="slow"/>
+    </mc:Fallback>
+  </mc:AlternateContent>
+</p:sld>
+</file>
+
+<file path=ppt/slides/slide3.xml><?xml version="1.0" encoding="utf-8"?>
+<p:sld xmlns:a="http://schemas.openxmlformats.org/drawingml/2006/main" xmlns:p="http://schemas.openxmlformats.org/presentationml/2006/main" xmlns:r="http://schemas.openxmlformats.org/officeDocument/2006/relationships" xmlns:p14="http://schemas.microsoft.com/office/powerpoint/2010/main" xmlns:p15="http://schemas.microsoft.com/office/powerpoint/2012/main" xmlns:mc="http://schemas.openxmlformats.org/markup-compatibility/2006">
+  <p:cSld>
+    <p:spTree>
+      <p:nvGrpSpPr>
+        <p:cNvPr id="1" name=""/>
+        <p:cNvGrpSpPr/>
+        <p:nvPr/>
+      </p:nvGrpSpPr>
+      <p:grpSpPr>
+        <a:xfrm>
+          <a:off x="0" y="0"/>
+          <a:ext cx="0" cy="0"/>
+          <a:chOff x="0" y="0"/>
+          <a:chExt cx="0" cy="0"/>
+        </a:xfrm>
+      </p:grpSpPr>
+      <p:sp>
+        <p:nvSpPr>
+          <p:cNvPr id="22" name=""/>
+          <p:cNvSpPr txBox="1"/>
+          <p:nvPr/>
+        </p:nvSpPr>
+        <p:spPr>
+          <a:xfrm>
+            <a:off x="720000" y="360000"/>
+            <a:ext cx="8640000" cy="1080000"/>
+          </a:xfrm>
+          <a:prstGeom prst="rect">
+            <a:avLst/>
+          </a:prstGeom>
+          <a:solidFill>
+            <a:schemeClr val="accent1"/>
+          </a:solidFill>
+          <a:ln w="38160">
+            <a:solidFill>
+              <a:schemeClr val="accent1">
+                <a:lumMod val="75000"/>
+                <a:lumOff val="0"/>
+              </a:schemeClr>
+            </a:solidFill>
+            <a:round/>
+          </a:ln>
+        </p:spPr>
+        <p:txBody>
+          <a:bodyPr lIns="90000" tIns="45000" rIns="90000" bIns="45000" anchor="t">
+            <a:spAutoFit/>
+          </a:bodyPr>
+          <a:p>
+            <a:pPr/>
+            <a:r>
+              <a:rPr lang="en-US" sz="1800" b="0" u="none" strike="noStrike">
+                <a:solidFill>
+                  <a:srgbClr val="FFFFFF"/>
+                </a:solidFill>
+                <a:effectLst/>
+                <a:uFillTx/>
+                <a:latin typeface="Arial"/>
+              </a:rPr>
+              <a:t>Slide 3: Architecture</a:t>
+            </a:r>
+            <a:endParaRPr lang="en-US" sz="1800" b="0" u="none" strike="noStrike">
+              <a:solidFill>
+                <a:srgbClr val="FFFFFF"/>
+              </a:solidFill>
+              <a:effectLst/>
+              <a:uFillTx/>
+              <a:latin typeface="Arial"/>
+            </a:endParaRPr>
+          </a:p>
+        </p:txBody>
+      </p:sp>
+      <p:sp>
+        <p:nvSpPr>
+          <p:cNvPr id="23" name=""/>
+          <p:cNvSpPr txBox="1"/>
+          <p:nvPr/>
+        </p:nvSpPr>
+        <p:spPr>
+          <a:xfrm>
+            <a:off x="720000" y="1800000"/>
+            <a:ext cx="8640000" cy="5040000"/>
+          </a:xfrm>
+          <a:prstGeom prst="rect">
+            <a:avLst/>
+          </a:prstGeom>
+          <a:solidFill>
+            <a:schemeClr val="accent1"/>
+          </a:solidFill>
+          <a:ln w="38160">
+            <a:solidFill>
+              <a:schemeClr val="accent1">
+                <a:lumMod val="75000"/>
+                <a:lumOff val="0"/>
+              </a:schemeClr>
+            </a:solidFill>
+            <a:round/>
+          </a:ln>
+        </p:spPr>
+        <p:txBody>
+          <a:bodyPr lIns="90000" tIns="45000" rIns="90000" bIns="45000" anchor="t">
+            <a:spAutoFit/>
+          </a:bodyPr>
+          <a:p>
+            <a:pPr marL="216000" indent="-216000">
+              <a:buClr>
+                <a:srgbClr val="000000"/>
+              </a:buClr>
+              <a:buSzPct val="45000"/>
+              <a:buFont typeface="starbats" charset="2"/>
+              <a:buChar char=""/>
+            </a:pPr>
+            <a:r>
+              <a:rPr lang="en-US" sz="1800" b="0" u="none" strike="noStrike">
+                <a:solidFill>
+                  <a:srgbClr val="FFFFFF"/>
+                </a:solidFill>
+                <a:effectLst/>
+                <a:uFillTx/>
+                <a:latin typeface="Arial"/>
+              </a:rPr>
+              <a:t>Top level point</a:t>
+            </a:r>
+            <a:endParaRPr lang="en-US" sz="1800" b="0" u="none" strike="noStrike">
+              <a:solidFill>
+                <a:srgbClr val="FFFFFF"/>
+              </a:solidFill>
+              <a:effectLst/>
+              <a:uFillTx/>
+              <a:latin typeface="Arial"/>
+            </a:endParaRPr>
+          </a:p>
+          <a:p>
+            <a:pPr marL="432000" lvl="1" indent="-216000">
+              <a:buClr>
+                <a:srgbClr val="000000"/>
+              </a:buClr>
+              <a:buSzPct val="45000"/>
+              <a:buFont typeface="starbats" charset="2"/>
+              <a:buChar char=""/>
+            </a:pPr>
+            <a:r>
+              <a:rPr lang="en-US" sz="1800" b="0" u="none" strike="noStrike">
+                <a:solidFill>
+                  <a:srgbClr val="FFFFFF"/>
+                </a:solidFill>
+                <a:effectLst/>
+                <a:uFillTx/>
+                <a:latin typeface="Arial"/>
+              </a:rPr>
+              <a:t>Nested detail</a:t>
+            </a:r>
+            <a:endParaRPr lang="en-US" sz="1800" b="0" u="none" strike="noStrike">
+              <a:solidFill>
+                <a:srgbClr val="FFFFFF"/>
+              </a:solidFill>
+              <a:effectLst/>
+              <a:uFillTx/>
+              <a:latin typeface="Arial"/>
+            </a:endParaRPr>
+          </a:p>
+          <a:p>
+            <a:pPr marL="216000" indent="-216000">
+              <a:buClr>
+                <a:srgbClr val="000000"/>
+              </a:buClr>
+              <a:buSzPct val="45000"/>
+              <a:buFont typeface="starbats" charset="2"/>
+              <a:buChar char=""/>
+            </a:pPr>
+            <a:r>
+              <a:rPr lang="en-US" sz="1800" b="0" u="none" strike="noStrike">
+                <a:solidFill>
+                  <a:srgbClr val="FFFFFF"/>
+                </a:solidFill>
+                <a:effectLst/>
+                <a:uFillTx/>
+                <a:latin typeface="Arial"/>
+              </a:rPr>
+              <a:t>Second point with emphasis</a:t>
+            </a:r>
+            <a:endParaRPr lang="en-US" sz="1800" b="0" u="none" strike="noStrike">
+              <a:solidFill>
+                <a:srgbClr val="FFFFFF"/>
+              </a:solidFill>
+              <a:effectLst/>
+              <a:uFillTx/>
+              <a:latin typeface="Arial"/>
+            </a:endParaRPr>
+          </a:p>
+        </p:txBody>
+      </p:sp>
+    </p:spTree>
+  </p:cSld>
+  <mc:AlternateContent>
+    <mc:Choice Requires="p14">
+      <p:transition spd="slow" p14:dur="2000"/>
+    </mc:Choice>
+    <mc:Fallback>
+      <p:transition spd="slow"/>
+    </mc:Fallback>
+  </mc:AlternateContent>
+</p:sld>
+</file>
+
+<file path=ppt/slides/slide4.xml><?xml version="1.0" encoding="utf-8"?>
+<p:sld xmlns:a="http://schemas.openxmlformats.org/drawingml/2006/main" xmlns:p="http://schemas.openxmlformats.org/presentationml/2006/main" xmlns:r="http://schemas.openxmlformats.org/officeDocument/2006/relationships" xmlns:p14="http://schemas.microsoft.com/office/powerpoint/2010/main" xmlns:p15="http://schemas.microsoft.com/office/powerpoint/2012/main" xmlns:mc="http://schemas.openxmlformats.org/markup-compatibility/2006">
+  <p:cSld>
+    <p:spTree>
+      <p:nvGrpSpPr>
+        <p:cNvPr id="1" name=""/>
+        <p:cNvGrpSpPr/>
+        <p:nvPr/>
+      </p:nvGrpSpPr>
+      <p:grpSpPr>
+        <a:xfrm>
+          <a:off x="0" y="0"/>
+          <a:ext cx="0" cy="0"/>
+          <a:chOff x="0" y="0"/>
+          <a:chExt cx="0" cy="0"/>
+        </a:xfrm>
+      </p:grpSpPr>
+      <p:sp>
+        <p:nvSpPr>
+          <p:cNvPr id="24" name=""/>
+          <p:cNvSpPr txBox="1"/>
+          <p:nvPr/>
+        </p:nvSpPr>
+        <p:spPr>
+          <a:xfrm>
+            <a:off x="720000" y="360000"/>
+            <a:ext cx="8640000" cy="1080000"/>
+          </a:xfrm>
+          <a:prstGeom prst="rect">
+            <a:avLst/>
+          </a:prstGeom>
+          <a:solidFill>
+            <a:schemeClr val="accent1"/>
+          </a:solidFill>
+          <a:ln w="38160">
+            <a:solidFill>
+              <a:schemeClr val="accent1">
+                <a:lumMod val="75000"/>
+                <a:lumOff val="0"/>
+              </a:schemeClr>
+            </a:solidFill>
+            <a:round/>
+          </a:ln>
+        </p:spPr>
+        <p:txBody>
+          <a:bodyPr lIns="90000" tIns="45000" rIns="90000" bIns="45000" anchor="t">
+            <a:spAutoFit/>
+          </a:bodyPr>
+          <a:p>
+            <a:pPr/>
+            <a:r>
+              <a:rPr lang="en-US" sz="1800" b="0" u="none" strike="noStrike">
+                <a:solidFill>
+                  <a:srgbClr val="FFFFFF"/>
+                </a:solidFill>
+                <a:effectLst/>
+                <a:uFillTx/>
+                <a:latin typeface="Arial"/>
+              </a:rPr>
+              <a:t>Slide 4: Security</a:t>
+            </a:r>
+            <a:endParaRPr lang="en-US" sz="1800" b="0" u="none" strike="noStrike">
+              <a:solidFill>
+                <a:srgbClr val="FFFFFF"/>
+              </a:solidFill>
+              <a:effectLst/>
+              <a:uFillTx/>
+              <a:latin typeface="Arial"/>
+            </a:endParaRPr>
+          </a:p>
+        </p:txBody>
+      </p:sp>
+      <p:graphicFrame>
+        <p:nvGraphicFramePr>
+          <p:cNvPr id="25" name=""/>
+          <p:cNvGraphicFramePr/>
+          <p:nvPr/>
+        </p:nvGraphicFramePr>
+        <p:xfrm>
+          <a:off x="720000" y="1800000"/>
+          <a:ext cx="7200000" cy="2880000"/>
+        </p:xfrm>
+        <a:graphic>
+          <a:graphicData uri="http://schemas.openxmlformats.org/drawingml/2006/table">
+            <a:tbl>
+              <a:tblPr/>
+              <a:tblGrid>
+                <a:gridCol w="3600000"/>
+                <a:gridCol w="3600000"/>
+              </a:tblGrid>
+              <a:tr h="1440000">
+                <a:tc>
+                  <a:txBody>
+                    <a:bodyPr lIns="90000" tIns="45000" rIns="90000" bIns="45000" anchor="t">
+                      <a:noAutofit/>
+                    </a:bodyPr>
+                    <a:p>
+                      <a:pPr/>
+                      <a:r>
+                        <a:rPr lang="en-US" sz="1800" b="0" u="none" strike="noStrike">
+                          <a:solidFill>
+                            <a:srgbClr val="FFFFFF"/>
+                          </a:solidFill>
+                          <a:effectLst/>
+                          <a:uFillTx/>
+                          <a:latin typeface="Arial"/>
+                        </a:rPr>
+                        <a:t>Region</a:t>
+                      </a:r>
+                      <a:endParaRPr lang="en-US" sz="1800" b="0" u="none" strike="noStrike">
+                        <a:solidFill>
+                          <a:srgbClr val="FFFFFF"/>
+                        </a:solidFill>
+                        <a:effectLst/>
+                        <a:uFillTx/>
+                        <a:latin typeface="Arial"/>
+                      </a:endParaRPr>
+                    </a:p>
+                  </a:txBody>
+                  <a:tcPr anchor="t" marL="90000" marR="90000" marT="45000" marB="45000">
+                    <a:lnL>
+                      <a:noFill/>
+                    </a:lnL>
+                    <a:lnR>
+                      <a:noFill/>
+                    </a:lnR>
+                    <a:lnT>
+                      <a:noFill/>
+                    </a:lnT>
+                    <a:lnB>
+                      <a:noFill/>
+                    </a:lnB>
+                    <a:solidFill>
+                      <a:schemeClr val="accent1"/>
+                    </a:solidFill>
+                  </a:tcPr>
+                </a:tc>
+                <a:tc>
+                  <a:txBody>
+                    <a:bodyPr lIns="90000" tIns="45000" rIns="90000" bIns="45000" anchor="t">
+                      <a:noAutofit/>
+                    </a:bodyPr>
+                    <a:p>
+                      <a:pPr/>
+                      <a:r>
+                        <a:rPr lang="en-US" sz="1800" b="0" u="none" strike="noStrike">
+                          <a:solidFill>
+                            <a:srgbClr val="FFFFFF"/>
+                          </a:solidFill>
+                          <a:effectLst/>
+                          <a:uFillTx/>
+                          <a:latin typeface="Arial"/>
+                        </a:rPr>
+                        <a:t>Total</a:t>
+                      </a:r>
+                      <a:endParaRPr lang="en-US" sz="1800" b="0" u="none" strike="noStrike">
+                        <a:solidFill>
+                          <a:srgbClr val="FFFFFF"/>
+                        </a:solidFill>
+                        <a:effectLst/>
+                        <a:uFillTx/>
+                        <a:latin typeface="Arial"/>
+                      </a:endParaRPr>
+                    </a:p>
+                  </a:txBody>
+                  <a:tcPr anchor="t" marL="90000" marR="90000" marT="45000" marB="45000">
+                    <a:lnL>
+                      <a:noFill/>
+                    </a:lnL>
+                    <a:lnR>
+                      <a:noFill/>
+                    </a:lnR>
+                    <a:lnT>
+                      <a:noFill/>
+                    </a:lnT>
+                    <a:lnB>
+                      <a:noFill/>
+                    </a:lnB>
+                    <a:solidFill>
+                      <a:schemeClr val="accent1"/>
+                    </a:solidFill>
+                  </a:tcPr>
+                </a:tc>
+              </a:tr>
+              <a:tr h="1440000">
+                <a:tc>
+                  <a:txBody>
+                    <a:bodyPr lIns="90000" tIns="45000" rIns="90000" bIns="45000" anchor="t">
+                      <a:noAutofit/>
+                    </a:bodyPr>
+                    <a:p>
+                      <a:pPr/>
+                      <a:r>
+                        <a:rPr lang="en-US" sz="1800" b="0" u="none" strike="noStrike">
+                          <a:solidFill>
+                            <a:srgbClr val="FFFFFF"/>
+                          </a:solidFill>
+                          <a:effectLst/>
+                          <a:uFillTx/>
+                          <a:latin typeface="Arial"/>
+                        </a:rPr>
+                        <a:t>North</a:t>
+                      </a:r>
+                      <a:endParaRPr lang="en-US" sz="1800" b="0" u="none" strike="noStrike">
+                        <a:solidFill>
+                          <a:srgbClr val="FFFFFF"/>
+                        </a:solidFill>
+                        <a:effectLst/>
+                        <a:uFillTx/>
+                        <a:latin typeface="Arial"/>
+                      </a:endParaRPr>
+                    </a:p>
+                  </a:txBody>
+                  <a:tcPr anchor="t" marL="90000" marR="90000" marT="45000" marB="45000">
+                    <a:lnL>
+                      <a:noFill/>
+                    </a:lnL>
+                    <a:lnR>
+                      <a:noFill/>
+                    </a:lnR>
+                    <a:lnT>
+                      <a:noFill/>
+                    </a:lnT>
+                    <a:lnB>
+                      <a:noFill/>
+                    </a:lnB>
+                    <a:solidFill>
+                      <a:schemeClr val="accent1"/>
+                    </a:solidFill>
+                  </a:tcPr>
+                </a:tc>
+                <a:tc>
+                  <a:txBody>
+                    <a:bodyPr lIns="90000" tIns="45000" rIns="90000" bIns="45000" anchor="t">
+                      <a:noAutofit/>
+                    </a:bodyPr>
+                    <a:p>
+                      <a:pPr/>
+                      <a:r>
+                        <a:rPr lang="en-US" sz="1800" b="0" u="none" strike="noStrike">
+                          <a:solidFill>
+                            <a:srgbClr val="FFFFFF"/>
+                          </a:solidFill>
+                          <a:effectLst/>
+                          <a:uFillTx/>
+                          <a:latin typeface="Arial"/>
+                        </a:rPr>
+                        <a:t>42</a:t>
+                      </a:r>
+                      <a:endParaRPr lang="en-US" sz="1800" b="0" u="none" strike="noStrike">
+                        <a:solidFill>
+                          <a:srgbClr val="FFFFFF"/>
+                        </a:solidFill>
+                        <a:effectLst/>
+                        <a:uFillTx/>
+                        <a:latin typeface="Arial"/>
+                      </a:endParaRPr>
+                    </a:p>
+                  </a:txBody>
+                  <a:tcPr anchor="t" marL="90000" marR="90000" marT="45000" marB="45000">
+                    <a:lnL>
+                      <a:noFill/>
+                    </a:lnL>
+                    <a:lnR>
+                      <a:noFill/>
+                    </a:lnR>
+                    <a:lnT>
+                      <a:noFill/>
+                    </a:lnT>
+                    <a:lnB>
+                      <a:noFill/>
+                    </a:lnB>
+                    <a:solidFill>
+                      <a:schemeClr val="accent1"/>
+                    </a:solidFill>
+                  </a:tcPr>
+                </a:tc>
+              </a:tr>
+            </a:tbl>
+          </a:graphicData>
+        </a:graphic>
+      </p:graphicFrame>
+      <p:sp>
+        <p:nvSpPr>
+          <p:cNvPr id="26" name=""/>
+          <p:cNvSpPr txBox="1"/>
+          <p:nvPr/>
+        </p:nvSpPr>
+        <p:spPr>
+          <a:xfrm>
+            <a:off x="720000" y="5040000"/>
+            <a:ext cx="7200000" cy="1440000"/>
+          </a:xfrm>
+          <a:prstGeom prst="rect">
+            <a:avLst/>
+          </a:prstGeom>
+          <a:solidFill>
+            <a:schemeClr val="accent1"/>
+          </a:solidFill>
+          <a:ln w="38160">
+            <a:solidFill>
+              <a:schemeClr val="accent1">
+                <a:lumMod val="75000"/>
+                <a:lumOff val="0"/>
+              </a:schemeClr>
+            </a:solidFill>
+            <a:round/>
+          </a:ln>
+        </p:spPr>
+        <p:txBody>
+          <a:bodyPr lIns="90000" tIns="45000" rIns="90000" bIns="45000" anchor="t">
+            <a:spAutoFit/>
+          </a:bodyPr>
+          <a:p>
+            <a:pPr/>
+            <a:r>
+              <a:rPr lang="en-US" sz="1800" b="0" u="none" strike="noStrike">
+                <a:solidFill>
+                  <a:srgbClr val="FFFFFF"/>
+                </a:solidFill>
+                <a:effectLst/>
+                <a:uFillTx/>
+                <a:latin typeface="Arial"/>
+              </a:rPr>
+              <a:t>Grouped shapes below.</a:t>
+            </a:r>
+            <a:endParaRPr lang="en-US" sz="1800" b="0" u="none" strike="noStrike">
+              <a:solidFill>
+                <a:srgbClr val="FFFFFF"/>
+              </a:solidFill>
+              <a:effectLst/>
+              <a:uFillTx/>
+              <a:latin typeface="Arial"/>
+            </a:endParaRPr>
+          </a:p>
+        </p:txBody>
+      </p:sp>
+      <p:grpSp>
+        <p:nvGrpSpPr>
+          <p:cNvPr id="27" name="Group4"/>
+          <p:cNvGrpSpPr/>
+          <p:nvPr/>
+        </p:nvGrpSpPr>
+        <p:grpSpPr>
+          <a:xfrm>
+            <a:off x="720000" y="6480000"/>
+            <a:ext cx="2880000" cy="720000"/>
+            <a:chOff x="720000" y="6480000"/>
+            <a:chExt cx="2880000" cy="720000"/>
+          </a:xfrm>
+        </p:grpSpPr>
+        <p:sp>
+          <p:nvSpPr>
+            <p:cNvPr id="28" name=""/>
+            <p:cNvSpPr txBox="1"/>
+            <p:nvPr/>
+          </p:nvSpPr>
+          <p:spPr>
+            <a:xfrm>
+              <a:off x="720000" y="6480000"/>
+              <a:ext cx="2880000" cy="720000"/>
+            </a:xfrm>
+            <a:prstGeom prst="rect">
+              <a:avLst/>
+            </a:prstGeom>
+            <a:solidFill>
+              <a:schemeClr val="accent1"/>
+            </a:solidFill>
+            <a:ln w="38160">
+              <a:solidFill>
+                <a:schemeClr val="accent1">
+                  <a:lumMod val="75000"/>
+                  <a:lumOff val="0"/>
+                </a:schemeClr>
+              </a:solidFill>
+              <a:round/>
+            </a:ln>
+          </p:spPr>
+          <p:txBody>
+            <a:bodyPr lIns="90000" tIns="45000" rIns="90000" bIns="45000" anchor="t">
+              <a:spAutoFit/>
+            </a:bodyPr>
+            <a:p>
+              <a:pPr/>
+              <a:r>
+                <a:rPr lang="en-US" sz="1800" b="0" u="none" strike="noStrike">
+                  <a:solidFill>
+                    <a:srgbClr val="FFFFFF"/>
+                  </a:solidFill>
+                  <a:effectLst/>
+                  <a:uFillTx/>
+                  <a:latin typeface="Arial"/>
+                </a:rPr>
+                <a:t>Inside a group shape.</a:t>
+              </a:r>
+              <a:endParaRPr lang="en-US" sz="1800" b="0" u="none" strike="noStrike">
+                <a:solidFill>
+                  <a:srgbClr val="FFFFFF"/>
+                </a:solidFill>
+                <a:effectLst/>
+                <a:uFillTx/>
+                <a:latin typeface="Arial"/>
+              </a:endParaRPr>
+            </a:p>
+          </p:txBody>
+        </p:sp>
+      </p:grpSp>
+    </p:spTree>
+  </p:cSld>
+  <mc:AlternateContent>
+    <mc:Choice Requires="p14">
+      <p:transition spd="slow" p14:dur="2000"/>
+    </mc:Choice>
+    <mc:Fallback>
+      <p:transition spd="slow"/>
+    </mc:Fallback>
+  </mc:AlternateContent>
+</p:sld>
+</file>
+
+<file path=ppt/slides/slide5.xml><?xml version="1.0" encoding="utf-8"?>
+<p:sld xmlns:a="http://schemas.openxmlformats.org/drawingml/2006/main" xmlns:p="http://schemas.openxmlformats.org/presentationml/2006/main" xmlns:r="http://schemas.openxmlformats.org/officeDocument/2006/relationships" xmlns:p14="http://schemas.microsoft.com/office/powerpoint/2010/main" xmlns:p15="http://schemas.microsoft.com/office/powerpoint/2012/main" xmlns:mc="http://schemas.openxmlformats.org/markup-compatibility/2006">
+  <p:cSld>
+    <p:spTree>
+      <p:nvGrpSpPr>
+        <p:cNvPr id="1" name=""/>
+        <p:cNvGrpSpPr/>
+        <p:nvPr/>
+      </p:nvGrpSpPr>
+      <p:grpSpPr>
+        <a:xfrm>
+          <a:off x="0" y="0"/>
+          <a:ext cx="0" cy="0"/>
+          <a:chOff x="0" y="0"/>
+          <a:chExt cx="0" cy="0"/>
+        </a:xfrm>
+      </p:grpSpPr>
+      <p:sp>
+        <p:nvSpPr>
+          <p:cNvPr id="29" name=""/>
+          <p:cNvSpPr txBox="1"/>
+          <p:nvPr/>
+        </p:nvSpPr>
+        <p:spPr>
+          <a:xfrm>
+            <a:off x="720000" y="360000"/>
+            <a:ext cx="8640000" cy="1080000"/>
+          </a:xfrm>
+          <a:prstGeom prst="rect">
+            <a:avLst/>
+          </a:prstGeom>
+          <a:solidFill>
+            <a:schemeClr val="accent1"/>
+          </a:solidFill>
+          <a:ln w="38160">
+            <a:solidFill>
+              <a:schemeClr val="accent1">
+                <a:lumMod val="75000"/>
+                <a:lumOff val="0"/>
+              </a:schemeClr>
+            </a:solidFill>
+            <a:round/>
+          </a:ln>
+        </p:spPr>
+        <p:txBody>
+          <a:bodyPr lIns="90000" tIns="45000" rIns="90000" bIns="45000" anchor="t">
+            <a:spAutoFit/>
+          </a:bodyPr>
+          <a:p>
+            <a:pPr/>
+            <a:r>
+              <a:rPr lang="en-US" sz="1800" b="0" u="none" strike="noStrike">
+                <a:solidFill>
+                  <a:srgbClr val="FFFFFF"/>
+                </a:solidFill>
+                <a:effectLst/>
+                <a:uFillTx/>
+                <a:latin typeface="Arial"/>
+              </a:rPr>
+              <a:t>Slide 5: Search</a:t>
+            </a:r>
+            <a:endParaRPr lang="en-US" sz="1800" b="0" u="none" strike="noStrike">
+              <a:solidFill>
+                <a:srgbClr val="FFFFFF"/>
+              </a:solidFill>
+              <a:effectLst/>
+              <a:uFillTx/>
+              <a:latin typeface="Arial"/>
+            </a:endParaRPr>
+          </a:p>
+        </p:txBody>
+      </p:sp>
+      <p:sp>
+        <p:nvSpPr>
+          <p:cNvPr id="30" name=""/>
+          <p:cNvSpPr txBox="1"/>
+          <p:nvPr/>
+        </p:nvSpPr>
+        <p:spPr>
+          <a:xfrm>
+            <a:off x="720000" y="1800000"/>
+            <a:ext cx="8640000" cy="5040000"/>
+          </a:xfrm>
+          <a:prstGeom prst="rect">
+            <a:avLst/>
+          </a:prstGeom>
+          <a:solidFill>
+            <a:schemeClr val="accent1"/>
+          </a:solidFill>
+          <a:ln w="38160">
+            <a:solidFill>
+              <a:schemeClr val="accent1">
+                <a:lumMod val="75000"/>
+                <a:lumOff val="0"/>
+              </a:schemeClr>
+            </a:solidFill>
+            <a:round/>
+          </a:ln>
+        </p:spPr>
+        <p:txBody>
+          <a:bodyPr lIns="90000" tIns="45000" rIns="90000" bIns="45000" anchor="t">
+            <a:spAutoFit/>
+          </a:bodyPr>
+          <a:p>
+            <a:pPr marL="216000" indent="-216000">
+              <a:buClr>
+                <a:srgbClr val="000000"/>
+              </a:buClr>
+              <a:buSzPct val="45000"/>
+              <a:buFont typeface="starbats" charset="2"/>
+              <a:buChar char=""/>
+            </a:pPr>
+            <a:r>
+              <a:rPr lang="en-US" sz="1800" b="0" u="none" strike="noStrike">
+                <a:solidFill>
+                  <a:srgbClr val="FFFFFF"/>
+                </a:solidFill>
+                <a:effectLst/>
+                <a:uFillTx/>
+                <a:latin typeface="Arial"/>
+              </a:rPr>
+              <a:t>Top level point</a:t>
+            </a:r>
+            <a:endParaRPr lang="en-US" sz="1800" b="0" u="none" strike="noStrike">
+              <a:solidFill>
+                <a:srgbClr val="FFFFFF"/>
+              </a:solidFill>
+              <a:effectLst/>
+              <a:uFillTx/>
+              <a:latin typeface="Arial"/>
+            </a:endParaRPr>
+          </a:p>
+          <a:p>
+            <a:pPr marL="432000" lvl="1" indent="-216000">
+              <a:buClr>
+                <a:srgbClr val="000000"/>
+              </a:buClr>
+              <a:buSzPct val="45000"/>
+              <a:buFont typeface="starbats" charset="2"/>
+              <a:buChar char=""/>
+            </a:pPr>
+            <a:r>
+              <a:rPr lang="en-US" sz="1800" b="0" u="none" strike="noStrike">
+                <a:solidFill>
+                  <a:srgbClr val="FFFFFF"/>
+                </a:solidFill>
+                <a:effectLst/>
+                <a:uFillTx/>
+                <a:latin typeface="Arial"/>
+              </a:rPr>
+              <a:t>Nested detail</a:t>
+            </a:r>
+            <a:endParaRPr lang="en-US" sz="1800" b="0" u="none" strike="noStrike">
+              <a:solidFill>
+                <a:srgbClr val="FFFFFF"/>
+              </a:solidFill>
+              <a:effectLst/>
+              <a:uFillTx/>
+              <a:latin typeface="Arial"/>
+            </a:endParaRPr>
+          </a:p>
+          <a:p>
+            <a:pPr marL="216000" indent="-216000">
+              <a:buClr>
+                <a:srgbClr val="000000"/>
+              </a:buClr>
+              <a:buSzPct val="45000"/>
+              <a:buFont typeface="starbats" charset="2"/>
+              <a:buChar char=""/>
+            </a:pPr>
+            <a:r>
+              <a:rPr lang="en-US" sz="1800" b="0" u="none" strike="noStrike">
+                <a:solidFill>
+                  <a:srgbClr val="FFFFFF"/>
+                </a:solidFill>
+                <a:effectLst/>
+                <a:uFillTx/>
+                <a:latin typeface="Arial"/>
+              </a:rPr>
+              <a:t>Second point with emphasis</a:t>
+            </a:r>
+            <a:endParaRPr lang="en-US" sz="1800" b="0" u="none" strike="noStrike">
+              <a:solidFill>
+                <a:srgbClr val="FFFFFF"/>
+              </a:solidFill>
+              <a:effectLst/>
+              <a:uFillTx/>
+              <a:latin typeface="Arial"/>
+            </a:endParaRPr>
+          </a:p>
+        </p:txBody>
+      </p:sp>
+    </p:spTree>
+  </p:cSld>
+  <mc:AlternateContent>
+    <mc:Choice Requires="p14">
+      <p:transition spd="slow" p14:dur="2000"/>
+    </mc:Choice>
+    <mc:Fallback>
+      <p:transition spd="slow"/>
+    </mc:Fallback>
+  </mc:AlternateContent>
+</p:sld>
+</file>
+
+<file path=ppt/slides/slide6.xml><?xml version="1.0" encoding="utf-8"?>
+<p:sld xmlns:a="http://schemas.openxmlformats.org/drawingml/2006/main" xmlns:p="http://schemas.openxmlformats.org/presentationml/2006/main" xmlns:r="http://schemas.openxmlformats.org/officeDocument/2006/relationships" xmlns:p14="http://schemas.microsoft.com/office/powerpoint/2010/main" xmlns:p15="http://schemas.microsoft.com/office/powerpoint/2012/main" xmlns:mc="http://schemas.openxmlformats.org/markup-compatibility/2006">
+  <p:cSld>
+    <p:spTree>
+      <p:nvGrpSpPr>
+        <p:cNvPr id="1" name=""/>
+        <p:cNvGrpSpPr/>
+        <p:nvPr/>
+      </p:nvGrpSpPr>
+      <p:grpSpPr>
+        <a:xfrm>
+          <a:off x="0" y="0"/>
+          <a:ext cx="0" cy="0"/>
+          <a:chOff x="0" y="0"/>
+          <a:chExt cx="0" cy="0"/>
+        </a:xfrm>
+      </p:grpSpPr>
+      <p:sp>
+        <p:nvSpPr>
+          <p:cNvPr id="31" name=""/>
+          <p:cNvSpPr txBox="1"/>
+          <p:nvPr/>
+        </p:nvSpPr>
+        <p:spPr>
+          <a:xfrm>
+            <a:off x="720000" y="360000"/>
+            <a:ext cx="8640000" cy="1080000"/>
+          </a:xfrm>
+          <a:prstGeom prst="rect">
+            <a:avLst/>
+          </a:prstGeom>
+          <a:solidFill>
+            <a:schemeClr val="accent1"/>
+          </a:solidFill>
+          <a:ln w="38160">
+            <a:solidFill>
+              <a:schemeClr val="accent1">
+                <a:lumMod val="75000"/>
+                <a:lumOff val="0"/>
+              </a:schemeClr>
+            </a:solidFill>
+            <a:round/>
+          </a:ln>
+        </p:spPr>
+        <p:txBody>
+          <a:bodyPr lIns="90000" tIns="45000" rIns="90000" bIns="45000" anchor="t">
+            <a:spAutoFit/>
+          </a:bodyPr>
+          <a:p>
+            <a:pPr/>
+            <a:r>
+              <a:rPr lang="en-US" sz="1800" b="0" u="none" strike="noStrike">
+                <a:solidFill>
+                  <a:srgbClr val="FFFFFF"/>
+                </a:solidFill>
+                <a:effectLst/>
+                <a:uFillTx/>
+                <a:latin typeface="Arial"/>
+              </a:rPr>
+              <a:t>Slide 6: Layout</a:t>
+            </a:r>
+            <a:endParaRPr lang="en-US" sz="1800" b="0" u="none" strike="noStrike">
+              <a:solidFill>
+                <a:srgbClr val="FFFFFF"/>
+              </a:solidFill>
+              <a:effectLst/>
+              <a:uFillTx/>
+              <a:latin typeface="Arial"/>
+            </a:endParaRPr>
+          </a:p>
+        </p:txBody>
+      </p:sp>
+      <p:graphicFrame>
+        <p:nvGraphicFramePr>
+          <p:cNvPr id="32" name=""/>
+          <p:cNvGraphicFramePr/>
+          <p:nvPr/>
+        </p:nvGraphicFramePr>
+        <p:xfrm>
+          <a:off x="720000" y="1800000"/>
+          <a:ext cx="7200000" cy="2880000"/>
+        </p:xfrm>
+        <a:graphic>
+          <a:graphicData uri="http://schemas.openxmlformats.org/drawingml/2006/table">
+            <a:tbl>
+              <a:tblPr/>
+              <a:tblGrid>
+                <a:gridCol w="3600000"/>
+                <a:gridCol w="3600000"/>
+              </a:tblGrid>
+              <a:tr h="1440000">
+                <a:tc>
+                  <a:txBody>
+                    <a:bodyPr lIns="90000" tIns="45000" rIns="90000" bIns="45000" anchor="t">
+                      <a:noAutofit/>
+                    </a:bodyPr>
+                    <a:p>
+                      <a:pPr/>
+                      <a:r>
+                        <a:rPr lang="en-US" sz="1800" b="0" u="none" strike="noStrike">
+                          <a:solidFill>
+                            <a:srgbClr val="FFFFFF"/>
+                          </a:solidFill>
+                          <a:effectLst/>
+                          <a:uFillTx/>
+                          <a:latin typeface="Arial"/>
+                        </a:rPr>
+                        <a:t>Region</a:t>
+                      </a:r>
+                      <a:endParaRPr lang="en-US" sz="1800" b="0" u="none" strike="noStrike">
+                        <a:solidFill>
+                          <a:srgbClr val="FFFFFF"/>
+                        </a:solidFill>
+                        <a:effectLst/>
+                        <a:uFillTx/>
+                        <a:latin typeface="Arial"/>
+                      </a:endParaRPr>
+                    </a:p>
+                  </a:txBody>
+                  <a:tcPr anchor="t" marL="90000" marR="90000" marT="45000" marB="45000">
+                    <a:lnL>
+                      <a:noFill/>
+                    </a:lnL>
+                    <a:lnR>
+                      <a:noFill/>
+                    </a:lnR>
+                    <a:lnT>
+                      <a:noFill/>
+                    </a:lnT>
+                    <a:lnB>
+                      <a:noFill/>
+                    </a:lnB>
+                    <a:solidFill>
+                      <a:schemeClr val="accent1"/>
+                    </a:solidFill>
+                  </a:tcPr>
+                </a:tc>
+                <a:tc>
+                  <a:txBody>
+                    <a:bodyPr lIns="90000" tIns="45000" rIns="90000" bIns="45000" anchor="t">
+                      <a:noAutofit/>
+                    </a:bodyPr>
+                    <a:p>
+                      <a:pPr/>
+                      <a:r>
+                        <a:rPr lang="en-US" sz="1800" b="0" u="none" strike="noStrike">
+                          <a:solidFill>
+                            <a:srgbClr val="FFFFFF"/>
+                          </a:solidFill>
+                          <a:effectLst/>
+                          <a:uFillTx/>
+                          <a:latin typeface="Arial"/>
+                        </a:rPr>
+                        <a:t>Total</a:t>
+                      </a:r>
+                      <a:endParaRPr lang="en-US" sz="1800" b="0" u="none" strike="noStrike">
+                        <a:solidFill>
+                          <a:srgbClr val="FFFFFF"/>
+                        </a:solidFill>
+                        <a:effectLst/>
+                        <a:uFillTx/>
+                        <a:latin typeface="Arial"/>
+                      </a:endParaRPr>
+                    </a:p>
+                  </a:txBody>
+                  <a:tcPr anchor="t" marL="90000" marR="90000" marT="45000" marB="45000">
+                    <a:lnL>
+                      <a:noFill/>
+                    </a:lnL>
+                    <a:lnR>
+                      <a:noFill/>
+                    </a:lnR>
+                    <a:lnT>
+                      <a:noFill/>
+                    </a:lnT>
+                    <a:lnB>
+                      <a:noFill/>
+                    </a:lnB>
+                    <a:solidFill>
+                      <a:schemeClr val="accent1"/>
+                    </a:solidFill>
+                  </a:tcPr>
+                </a:tc>
+              </a:tr>
+              <a:tr h="1440000">
+                <a:tc>
+                  <a:txBody>
+                    <a:bodyPr lIns="90000" tIns="45000" rIns="90000" bIns="45000" anchor="t">
+                      <a:noAutofit/>
+                    </a:bodyPr>
+                    <a:p>
+                      <a:pPr/>
+                      <a:r>
+                        <a:rPr lang="en-US" sz="1800" b="0" u="none" strike="noStrike">
+                          <a:solidFill>
+                            <a:srgbClr val="FFFFFF"/>
+                          </a:solidFill>
+                          <a:effectLst/>
+                          <a:uFillTx/>
+                          <a:latin typeface="Arial"/>
+                        </a:rPr>
+                        <a:t>North</a:t>
+                      </a:r>
+                      <a:endParaRPr lang="en-US" sz="1800" b="0" u="none" strike="noStrike">
+                        <a:solidFill>
+                          <a:srgbClr val="FFFFFF"/>
+                        </a:solidFill>
+                        <a:effectLst/>
+                        <a:uFillTx/>
+                        <a:latin typeface="Arial"/>
+                      </a:endParaRPr>
+                    </a:p>
+                  </a:txBody>
+                  <a:tcPr anchor="t" marL="90000" marR="90000" marT="45000" marB="45000">
+                    <a:lnL>
+                      <a:noFill/>
+                    </a:lnL>
+                    <a:lnR>
+                      <a:noFill/>
+                    </a:lnR>
+                    <a:lnT>
+                      <a:noFill/>
+                    </a:lnT>
+                    <a:lnB>
+                      <a:noFill/>
+                    </a:lnB>
+                    <a:solidFill>
+                      <a:schemeClr val="accent1"/>
+                    </a:solidFill>
+                  </a:tcPr>
+                </a:tc>
+                <a:tc>
+                  <a:txBody>
+                    <a:bodyPr lIns="90000" tIns="45000" rIns="90000" bIns="45000" anchor="t">
+                      <a:noAutofit/>
+                    </a:bodyPr>
+                    <a:p>
+                      <a:pPr/>
+                      <a:r>
+                        <a:rPr lang="en-US" sz="1800" b="0" u="none" strike="noStrike">
+                          <a:solidFill>
+                            <a:srgbClr val="FFFFFF"/>
+                          </a:solidFill>
+                          <a:effectLst/>
+                          <a:uFillTx/>
+                          <a:latin typeface="Arial"/>
+                        </a:rPr>
+                        <a:t>42</a:t>
+                      </a:r>
+                      <a:endParaRPr lang="en-US" sz="1800" b="0" u="none" strike="noStrike">
+                        <a:solidFill>
+                          <a:srgbClr val="FFFFFF"/>
+                        </a:solidFill>
+                        <a:effectLst/>
+                        <a:uFillTx/>
+                        <a:latin typeface="Arial"/>
+                      </a:endParaRPr>
+                    </a:p>
+                  </a:txBody>
+                  <a:tcPr anchor="t" marL="90000" marR="90000" marT="45000" marB="45000">
+                    <a:lnL>
+                      <a:noFill/>
+                    </a:lnL>
+                    <a:lnR>
+                      <a:noFill/>
+                    </a:lnR>
+                    <a:lnT>
+                      <a:noFill/>
+                    </a:lnT>
+                    <a:lnB>
+                      <a:noFill/>
+                    </a:lnB>
+                    <a:solidFill>
+                      <a:schemeClr val="accent1"/>
+                    </a:solidFill>
+                  </a:tcPr>
+                </a:tc>
+              </a:tr>
+            </a:tbl>
+          </a:graphicData>
+        </a:graphic>
+      </p:graphicFrame>
+      <p:sp>
+        <p:nvSpPr>
+          <p:cNvPr id="33" name=""/>
+          <p:cNvSpPr txBox="1"/>
+          <p:nvPr/>
+        </p:nvSpPr>
+        <p:spPr>
+          <a:xfrm>
+            <a:off x="720000" y="5040000"/>
+            <a:ext cx="7200000" cy="1440000"/>
+          </a:xfrm>
+          <a:prstGeom prst="rect">
+            <a:avLst/>
+          </a:prstGeom>
+          <a:solidFill>
+            <a:schemeClr val="accent1"/>
+          </a:solidFill>
+          <a:ln w="38160">
+            <a:solidFill>
+              <a:schemeClr val="accent1">
+                <a:lumMod val="75000"/>
+                <a:lumOff val="0"/>
+              </a:schemeClr>
+            </a:solidFill>
+            <a:round/>
+          </a:ln>
+        </p:spPr>
+        <p:txBody>
+          <a:bodyPr lIns="90000" tIns="45000" rIns="90000" bIns="45000" anchor="t">
+            <a:spAutoFit/>
+          </a:bodyPr>
+          <a:p>
+            <a:pPr/>
+            <a:r>
+              <a:rPr lang="en-US" sz="1800" b="0" u="none" strike="noStrike">
+                <a:solidFill>
+                  <a:srgbClr val="FFFFFF"/>
+                </a:solidFill>
+                <a:effectLst/>
+                <a:uFillTx/>
+                <a:latin typeface="Arial"/>
+              </a:rPr>
+              <a:t>Grouped shapes below.</a:t>
+            </a:r>
+            <a:endParaRPr lang="en-US" sz="1800" b="0" u="none" strike="noStrike">
+              <a:solidFill>
+                <a:srgbClr val="FFFFFF"/>
+              </a:solidFill>
+              <a:effectLst/>
+              <a:uFillTx/>
+              <a:latin typeface="Arial"/>
+            </a:endParaRPr>
+          </a:p>
+        </p:txBody>
+      </p:sp>
+      <p:grpSp>
+        <p:nvGrpSpPr>
+          <p:cNvPr id="34" name="Group6"/>
+          <p:cNvGrpSpPr/>
+          <p:nvPr/>
+        </p:nvGrpSpPr>
+        <p:grpSpPr>
+          <a:xfrm>
+            <a:off x="720000" y="6480000"/>
+            <a:ext cx="2880000" cy="720000"/>
+            <a:chOff x="720000" y="6480000"/>
+            <a:chExt cx="2880000" cy="720000"/>
+          </a:xfrm>
+        </p:grpSpPr>
+        <p:sp>
+          <p:nvSpPr>
+            <p:cNvPr id="35" name=""/>
+            <p:cNvSpPr txBox="1"/>
+            <p:nvPr/>
+          </p:nvSpPr>
+          <p:spPr>
+            <a:xfrm>
+              <a:off x="720000" y="6480000"/>
+              <a:ext cx="2880000" cy="720000"/>
+            </a:xfrm>
+            <a:prstGeom prst="rect">
+              <a:avLst/>
+            </a:prstGeom>
+            <a:solidFill>
+              <a:schemeClr val="accent1"/>
+            </a:solidFill>
+            <a:ln w="38160">
+              <a:solidFill>
+                <a:schemeClr val="accent1">
+                  <a:lumMod val="75000"/>
+                  <a:lumOff val="0"/>
+                </a:schemeClr>
+              </a:solidFill>
+              <a:round/>
+            </a:ln>
+          </p:spPr>
+          <p:txBody>
+            <a:bodyPr lIns="90000" tIns="45000" rIns="90000" bIns="45000" anchor="t">
+              <a:spAutoFit/>
+            </a:bodyPr>
+            <a:p>
+              <a:pPr/>
+              <a:r>
+                <a:rPr lang="en-US" sz="1800" b="0" u="none" strike="noStrike">
+                  <a:solidFill>
+                    <a:srgbClr val="FFFFFF"/>
+                  </a:solidFill>
+                  <a:effectLst/>
+                  <a:uFillTx/>
+                  <a:latin typeface="Arial"/>
+                </a:rPr>
+                <a:t>Inside a group shape.</a:t>
+              </a:r>
+              <a:endParaRPr lang="en-US" sz="1800" b="0" u="none" strike="noStrike">
+                <a:solidFill>
+                  <a:srgbClr val="FFFFFF"/>
+                </a:solidFill>
+                <a:effectLst/>
+                <a:uFillTx/>
+                <a:latin typeface="Arial"/>
+              </a:endParaRPr>
+            </a:p>
+          </p:txBody>
+        </p:sp>
+      </p:grpSp>
+    </p:spTree>
+  </p:cSld>
+  <mc:AlternateContent>
+    <mc:Choice Requires="p14">
+      <p:transition spd="slow" p14:dur="2000"/>
+    </mc:Choice>
+    <mc:Fallback>
+      <p:transition spd="slow"/>
+    </mc:Fallback>
+  </mc:AlternateContent>
+</p:sld>
+</file>
+
+<file path=ppt/slides/slide7.xml><?xml version="1.0" encoding="utf-8"?>
+<p:sld xmlns:a="http://schemas.openxmlformats.org/drawingml/2006/main" xmlns:p="http://schemas.openxmlformats.org/presentationml/2006/main" xmlns:r="http://schemas.openxmlformats.org/officeDocument/2006/relationships" xmlns:p14="http://schemas.microsoft.com/office/powerpoint/2010/main" xmlns:p15="http://schemas.microsoft.com/office/powerpoint/2012/main" xmlns:mc="http://schemas.openxmlformats.org/markup-compatibility/2006">
+  <p:cSld>
+    <p:spTree>
+      <p:nvGrpSpPr>
+        <p:cNvPr id="1" name=""/>
+        <p:cNvGrpSpPr/>
+        <p:nvPr/>
+      </p:nvGrpSpPr>
+      <p:grpSpPr>
+        <a:xfrm>
+          <a:off x="0" y="0"/>
+          <a:ext cx="0" cy="0"/>
+          <a:chOff x="0" y="0"/>
+          <a:chExt cx="0" cy="0"/>
+        </a:xfrm>
+      </p:grpSpPr>
+      <p:sp>
+        <p:nvSpPr>
+          <p:cNvPr id="36" name=""/>
+          <p:cNvSpPr txBox="1"/>
+          <p:nvPr/>
+        </p:nvSpPr>
+        <p:spPr>
+          <a:xfrm>
+            <a:off x="720000" y="360000"/>
+            <a:ext cx="8640000" cy="1080000"/>
+          </a:xfrm>
+          <a:prstGeom prst="rect">
+            <a:avLst/>
+          </a:prstGeom>
+          <a:solidFill>
+            <a:schemeClr val="accent1"/>
+          </a:solidFill>
+          <a:ln w="38160">
+            <a:solidFill>
+              <a:schemeClr val="accent1">
+                <a:lumMod val="75000"/>
+                <a:lumOff val="0"/>
+              </a:schemeClr>
+            </a:solidFill>
+            <a:round/>
+          </a:ln>
+        </p:spPr>
+        <p:txBody>
+          <a:bodyPr lIns="90000" tIns="45000" rIns="90000" bIns="45000" anchor="t">
+            <a:spAutoFit/>
+          </a:bodyPr>
+          <a:p>
+            <a:pPr/>
+            <a:r>
+              <a:rPr lang="en-US" sz="1800" b="0" u="none" strike="noStrike">
+                <a:solidFill>
+                  <a:srgbClr val="FFFFFF"/>
+                </a:solidFill>
+                <a:effectLst/>
+                <a:uFillTx/>
+                <a:latin typeface="Arial"/>
+              </a:rPr>
+              <a:t>Slide 7: Performance</a:t>
+            </a:r>
+            <a:endParaRPr lang="en-US" sz="1800" b="0" u="none" strike="noStrike">
+              <a:solidFill>
+                <a:srgbClr val="FFFFFF"/>
+              </a:solidFill>
+              <a:effectLst/>
+              <a:uFillTx/>
+              <a:latin typeface="Arial"/>
+            </a:endParaRPr>
+          </a:p>
+        </p:txBody>
+      </p:sp>
+      <p:sp>
+        <p:nvSpPr>
+          <p:cNvPr id="37" name=""/>
+          <p:cNvSpPr txBox="1"/>
+          <p:nvPr/>
+        </p:nvSpPr>
+        <p:spPr>
+          <a:xfrm>
+            <a:off x="720000" y="1800000"/>
+            <a:ext cx="8640000" cy="5040000"/>
+          </a:xfrm>
+          <a:prstGeom prst="rect">
+            <a:avLst/>
+          </a:prstGeom>
+          <a:solidFill>
+            <a:schemeClr val="accent1"/>
+          </a:solidFill>
+          <a:ln w="38160">
+            <a:solidFill>
+              <a:schemeClr val="accent1">
+                <a:lumMod val="75000"/>
+                <a:lumOff val="0"/>
+              </a:schemeClr>
+            </a:solidFill>
+            <a:round/>
+          </a:ln>
+        </p:spPr>
+        <p:txBody>
+          <a:bodyPr lIns="90000" tIns="45000" rIns="90000" bIns="45000" anchor="t">
+            <a:spAutoFit/>
+          </a:bodyPr>
+          <a:p>
+            <a:pPr marL="216000" indent="-216000">
+              <a:buClr>
+                <a:srgbClr val="000000"/>
+              </a:buClr>
+              <a:buSzPct val="45000"/>
+              <a:buFont typeface="starbats" charset="2"/>
+              <a:buChar char=""/>
+            </a:pPr>
+            <a:r>
+              <a:rPr lang="en-US" sz="1800" b="0" u="none" strike="noStrike">
+                <a:solidFill>
+                  <a:srgbClr val="FFFFFF"/>
+                </a:solidFill>
+                <a:effectLst/>
+                <a:uFillTx/>
+                <a:latin typeface="Arial"/>
+              </a:rPr>
+              <a:t>Top level point</a:t>
+            </a:r>
+            <a:endParaRPr lang="en-US" sz="1800" b="0" u="none" strike="noStrike">
+              <a:solidFill>
+                <a:srgbClr val="FFFFFF"/>
+              </a:solidFill>
+              <a:effectLst/>
+              <a:uFillTx/>
+              <a:latin typeface="Arial"/>
+            </a:endParaRPr>
+          </a:p>
+          <a:p>
+            <a:pPr marL="432000" lvl="1" indent="-216000">
+              <a:buClr>
+                <a:srgbClr val="000000"/>
+              </a:buClr>
+              <a:buSzPct val="45000"/>
+              <a:buFont typeface="starbats" charset="2"/>
+              <a:buChar char=""/>
+            </a:pPr>
+            <a:r>
+              <a:rPr lang="en-US" sz="1800" b="0" u="none" strike="noStrike">
+                <a:solidFill>
+                  <a:srgbClr val="FFFFFF"/>
+                </a:solidFill>
+                <a:effectLst/>
+                <a:uFillTx/>
+                <a:latin typeface="Arial"/>
+              </a:rPr>
+              <a:t>Nested detail</a:t>
+            </a:r>
+            <a:endParaRPr lang="en-US" sz="1800" b="0" u="none" strike="noStrike">
+              <a:solidFill>
+                <a:srgbClr val="FFFFFF"/>
+              </a:solidFill>
+              <a:effectLst/>
+              <a:uFillTx/>
+              <a:latin typeface="Arial"/>
+            </a:endParaRPr>
+          </a:p>
+          <a:p>
+            <a:pPr marL="216000" indent="-216000">
+              <a:buClr>
+                <a:srgbClr val="000000"/>
+              </a:buClr>
+              <a:buSzPct val="45000"/>
+              <a:buFont typeface="starbats" charset="2"/>
+              <a:buChar char=""/>
+            </a:pPr>
+            <a:r>
+              <a:rPr lang="en-US" sz="1800" b="0" u="none" strike="noStrike">
+                <a:solidFill>
+                  <a:srgbClr val="FFFFFF"/>
+                </a:solidFill>
+                <a:effectLst/>
+                <a:uFillTx/>
+                <a:latin typeface="Arial"/>
+              </a:rPr>
+              <a:t>Second point with emphasis</a:t>
+            </a:r>
+            <a:endParaRPr lang="en-US" sz="1800" b="0" u="none" strike="noStrike">
+              <a:solidFill>
+                <a:srgbClr val="FFFFFF"/>
+              </a:solidFill>
+              <a:effectLst/>
+              <a:uFillTx/>
+              <a:latin typeface="Arial"/>
+            </a:endParaRPr>
+          </a:p>
+        </p:txBody>
+      </p:sp>
+    </p:spTree>
+  </p:cSld>
+  <mc:AlternateContent>
+    <mc:Choice Requires="p14">
+      <p:transition spd="slow" p14:dur="2000"/>
+    </mc:Choice>
+    <mc:Fallback>
+      <p:transition spd="slow"/>
+    </mc:Fallback>
+  </mc:AlternateContent>
+</p:sld>
+</file>
+
+<file path=ppt/slides/slide8.xml><?xml version="1.0" encoding="utf-8"?>
+<p:sld xmlns:a="http://schemas.openxmlformats.org/drawingml/2006/main" xmlns:p="http://schemas.openxmlformats.org/presentationml/2006/main" xmlns:r="http://schemas.openxmlformats.org/officeDocument/2006/relationships" xmlns:p14="http://schemas.microsoft.com/office/powerpoint/2010/main" xmlns:p15="http://schemas.microsoft.com/office/powerpoint/2012/main" xmlns:mc="http://schemas.openxmlformats.org/markup-compatibility/2006">
+  <p:cSld>
+    <p:spTree>
+      <p:nvGrpSpPr>
+        <p:cNvPr id="1" name=""/>
+        <p:cNvGrpSpPr/>
+        <p:nvPr/>
+      </p:nvGrpSpPr>
+      <p:grpSpPr>
+        <a:xfrm>
+          <a:off x="0" y="0"/>
+          <a:ext cx="0" cy="0"/>
+          <a:chOff x="0" y="0"/>
+          <a:chExt cx="0" cy="0"/>
+        </a:xfrm>
+      </p:grpSpPr>
+      <p:sp>
+        <p:nvSpPr>
+          <p:cNvPr id="38" name=""/>
+          <p:cNvSpPr txBox="1"/>
+          <p:nvPr/>
+        </p:nvSpPr>
+        <p:spPr>
+          <a:xfrm>
+            <a:off x="720000" y="360000"/>
+            <a:ext cx="8640000" cy="1080000"/>
+          </a:xfrm>
+          <a:prstGeom prst="rect">
+            <a:avLst/>
+          </a:prstGeom>
+          <a:solidFill>
+            <a:schemeClr val="accent1"/>
+          </a:solidFill>
+          <a:ln w="38160">
+            <a:solidFill>
+              <a:schemeClr val="accent1">
+                <a:lumMod val="75000"/>
+                <a:lumOff val="0"/>
+              </a:schemeClr>
+            </a:solidFill>
+            <a:round/>
+          </a:ln>
+        </p:spPr>
+        <p:txBody>
+          <a:bodyPr lIns="90000" tIns="45000" rIns="90000" bIns="45000" anchor="t">
+            <a:spAutoFit/>
+          </a:bodyPr>
+          <a:p>
+            <a:pPr/>
+            <a:r>
+              <a:rPr lang="en-US" sz="1800" b="0" u="none" strike="noStrike">
+                <a:solidFill>
+                  <a:srgbClr val="FFFFFF"/>
+                </a:solidFill>
+                <a:effectLst/>
+                <a:uFillTx/>
+                <a:latin typeface="Arial"/>
+              </a:rPr>
+              <a:t>Slide 8: Accessibility</a:t>
+            </a:r>
+            <a:endParaRPr lang="en-US" sz="1800" b="0" u="none" strike="noStrike">
+              <a:solidFill>
+                <a:srgbClr val="FFFFFF"/>
+              </a:solidFill>
+              <a:effectLst/>
+              <a:uFillTx/>
+              <a:latin typeface="Arial"/>
+            </a:endParaRPr>
+          </a:p>
+        </p:txBody>
+      </p:sp>
+      <p:graphicFrame>
+        <p:nvGraphicFramePr>
+          <p:cNvPr id="39" name=""/>
+          <p:cNvGraphicFramePr/>
+          <p:nvPr/>
+        </p:nvGraphicFramePr>
+        <p:xfrm>
+          <a:off x="720000" y="1800000"/>
+          <a:ext cx="7200000" cy="2880000"/>
+        </p:xfrm>
+        <a:graphic>
+          <a:graphicData uri="http://schemas.openxmlformats.org/drawingml/2006/table">
+            <a:tbl>
+              <a:tblPr/>
+              <a:tblGrid>
+                <a:gridCol w="3600000"/>
+                <a:gridCol w="3600000"/>
+              </a:tblGrid>
+              <a:tr h="1440000">
+                <a:tc>
+                  <a:txBody>
+                    <a:bodyPr lIns="90000" tIns="45000" rIns="90000" bIns="45000" anchor="t">
+                      <a:noAutofit/>
+                    </a:bodyPr>
+                    <a:p>
+                      <a:pPr/>
+                      <a:r>
+                        <a:rPr lang="en-US" sz="1800" b="0" u="none" strike="noStrike">
+                          <a:solidFill>
+                            <a:srgbClr val="FFFFFF"/>
+                          </a:solidFill>
+                          <a:effectLst/>
+                          <a:uFillTx/>
+                          <a:latin typeface="Arial"/>
+                        </a:rPr>
+                        <a:t>Region</a:t>
+                      </a:r>
+                      <a:endParaRPr lang="en-US" sz="1800" b="0" u="none" strike="noStrike">
+                        <a:solidFill>
+                          <a:srgbClr val="FFFFFF"/>
+                        </a:solidFill>
+                        <a:effectLst/>
+                        <a:uFillTx/>
+                        <a:latin typeface="Arial"/>
+                      </a:endParaRPr>
+                    </a:p>
+                  </a:txBody>
+                  <a:tcPr anchor="t" marL="90000" marR="90000" marT="45000" marB="45000">
+                    <a:lnL>
+                      <a:noFill/>
+                    </a:lnL>
+                    <a:lnR>
+                      <a:noFill/>
+                    </a:lnR>
+                    <a:lnT>
+                      <a:noFill/>
+                    </a:lnT>
+                    <a:lnB>
+                      <a:noFill/>
+                    </a:lnB>
+                    <a:solidFill>
+                      <a:schemeClr val="accent1"/>
+                    </a:solidFill>
+                  </a:tcPr>
+                </a:tc>
+                <a:tc>
+                  <a:txBody>
+                    <a:bodyPr lIns="90000" tIns="45000" rIns="90000" bIns="45000" anchor="t">
+                      <a:noAutofit/>
+                    </a:bodyPr>
+                    <a:p>
+                      <a:pPr/>
+                      <a:r>
+                        <a:rPr lang="en-US" sz="1800" b="0" u="none" strike="noStrike">
+                          <a:solidFill>
+                            <a:srgbClr val="FFFFFF"/>
+                          </a:solidFill>
+                          <a:effectLst/>
+                          <a:uFillTx/>
+                          <a:latin typeface="Arial"/>
+                        </a:rPr>
+                        <a:t>Total</a:t>
+                      </a:r>
+                      <a:endParaRPr lang="en-US" sz="1800" b="0" u="none" strike="noStrike">
+                        <a:solidFill>
+                          <a:srgbClr val="FFFFFF"/>
+                        </a:solidFill>
+                        <a:effectLst/>
+                        <a:uFillTx/>
+                        <a:latin typeface="Arial"/>
+                      </a:endParaRPr>
+                    </a:p>
+                  </a:txBody>
+                  <a:tcPr anchor="t" marL="90000" marR="90000" marT="45000" marB="45000">
+                    <a:lnL>
+                      <a:noFill/>
+                    </a:lnL>
+                    <a:lnR>
+                      <a:noFill/>
+                    </a:lnR>
+                    <a:lnT>
+                      <a:noFill/>
+                    </a:lnT>
+                    <a:lnB>
+                      <a:noFill/>
+                    </a:lnB>
+                    <a:solidFill>
+                      <a:schemeClr val="accent1"/>
+                    </a:solidFill>
+                  </a:tcPr>
+                </a:tc>
+              </a:tr>
+              <a:tr h="1440000">
+                <a:tc>
+                  <a:txBody>
+                    <a:bodyPr lIns="90000" tIns="45000" rIns="90000" bIns="45000" anchor="t">
+                      <a:noAutofit/>
+                    </a:bodyPr>
+                    <a:p>
+                      <a:pPr/>
+                      <a:r>
+                        <a:rPr lang="en-US" sz="1800" b="0" u="none" strike="noStrike">
+                          <a:solidFill>
+                            <a:srgbClr val="FFFFFF"/>
+                          </a:solidFill>
+                          <a:effectLst/>
+                          <a:uFillTx/>
+                          <a:latin typeface="Arial"/>
+                        </a:rPr>
+                        <a:t>North</a:t>
+                      </a:r>
+                      <a:endParaRPr lang="en-US" sz="1800" b="0" u="none" strike="noStrike">
+                        <a:solidFill>
+                          <a:srgbClr val="FFFFFF"/>
+                        </a:solidFill>
+                        <a:effectLst/>
+                        <a:uFillTx/>
+                        <a:latin typeface="Arial"/>
+                      </a:endParaRPr>
+                    </a:p>
+                  </a:txBody>
+                  <a:tcPr anchor="t" marL="90000" marR="90000" marT="45000" marB="45000">
+                    <a:lnL>
+                      <a:noFill/>
+                    </a:lnL>
+                    <a:lnR>
+                      <a:noFill/>
+                    </a:lnR>
+                    <a:lnT>
+                      <a:noFill/>
+                    </a:lnT>
+                    <a:lnB>
+                      <a:noFill/>
+                    </a:lnB>
+                    <a:solidFill>
+                      <a:schemeClr val="accent1"/>
+                    </a:solidFill>
+                  </a:tcPr>
+                </a:tc>
+                <a:tc>
+                  <a:txBody>
+                    <a:bodyPr lIns="90000" tIns="45000" rIns="90000" bIns="45000" anchor="t">
+                      <a:noAutofit/>
+                    </a:bodyPr>
+                    <a:p>
+                      <a:pPr/>
+                      <a:r>
+                        <a:rPr lang="en-US" sz="1800" b="0" u="none" strike="noStrike">
+                          <a:solidFill>
+                            <a:srgbClr val="FFFFFF"/>
+                          </a:solidFill>
+                          <a:effectLst/>
+                          <a:uFillTx/>
+                          <a:latin typeface="Arial"/>
+                        </a:rPr>
+                        <a:t>42</a:t>
+                      </a:r>
+                      <a:endParaRPr lang="en-US" sz="1800" b="0" u="none" strike="noStrike">
+                        <a:solidFill>
+                          <a:srgbClr val="FFFFFF"/>
+                        </a:solidFill>
+                        <a:effectLst/>
+                        <a:uFillTx/>
+                        <a:latin typeface="Arial"/>
+                      </a:endParaRPr>
+                    </a:p>
+                  </a:txBody>
+                  <a:tcPr anchor="t" marL="90000" marR="90000" marT="45000" marB="45000">
+                    <a:lnL>
+                      <a:noFill/>
+                    </a:lnL>
+                    <a:lnR>
+                      <a:noFill/>
+                    </a:lnR>
+                    <a:lnT>
+                      <a:noFill/>
+                    </a:lnT>
+                    <a:lnB>
+                      <a:noFill/>
+                    </a:lnB>
+                    <a:solidFill>
+                      <a:schemeClr val="accent1"/>
+                    </a:solidFill>
+                  </a:tcPr>
+                </a:tc>
+              </a:tr>
+            </a:tbl>
+          </a:graphicData>
+        </a:graphic>
+      </p:graphicFrame>
+      <p:sp>
+        <p:nvSpPr>
+          <p:cNvPr id="40" name=""/>
+          <p:cNvSpPr txBox="1"/>
+          <p:nvPr/>
+        </p:nvSpPr>
+        <p:spPr>
+          <a:xfrm>
+            <a:off x="720000" y="5040000"/>
+            <a:ext cx="7200000" cy="1440000"/>
+          </a:xfrm>
+          <a:prstGeom prst="rect">
+            <a:avLst/>
+          </a:prstGeom>
+          <a:solidFill>
+            <a:schemeClr val="accent1"/>
+          </a:solidFill>
+          <a:ln w="38160">
+            <a:solidFill>
+              <a:schemeClr val="accent1">
+                <a:lumMod val="75000"/>
+                <a:lumOff val="0"/>
+              </a:schemeClr>
+            </a:solidFill>
+            <a:round/>
+          </a:ln>
+        </p:spPr>
+        <p:txBody>
+          <a:bodyPr lIns="90000" tIns="45000" rIns="90000" bIns="45000" anchor="t">
+            <a:spAutoFit/>
+          </a:bodyPr>
+          <a:p>
+            <a:pPr/>
+            <a:r>
+              <a:rPr lang="en-US" sz="1800" b="0" u="none" strike="noStrike">
+                <a:solidFill>
+                  <a:srgbClr val="FFFFFF"/>
+                </a:solidFill>
+                <a:effectLst/>
+                <a:uFillTx/>
+                <a:latin typeface="Arial"/>
+              </a:rPr>
+              <a:t>Grouped shapes below.</a:t>
+            </a:r>
+            <a:endParaRPr lang="en-US" sz="1800" b="0" u="none" strike="noStrike">
+              <a:solidFill>
+                <a:srgbClr val="FFFFFF"/>
+              </a:solidFill>
+              <a:effectLst/>
+              <a:uFillTx/>
+              <a:latin typeface="Arial"/>
+            </a:endParaRPr>
+          </a:p>
+        </p:txBody>
+      </p:sp>
+      <p:grpSp>
+        <p:nvGrpSpPr>
+          <p:cNvPr id="41" name="Group8"/>
+          <p:cNvGrpSpPr/>
+          <p:nvPr/>
+        </p:nvGrpSpPr>
+        <p:grpSpPr>
+          <a:xfrm>
+            <a:off x="720000" y="6480000"/>
+            <a:ext cx="2880000" cy="720000"/>
+            <a:chOff x="720000" y="6480000"/>
+            <a:chExt cx="2880000" cy="720000"/>
+          </a:xfrm>
+        </p:grpSpPr>
+        <p:sp>
+          <p:nvSpPr>
+            <p:cNvPr id="42" name=""/>
+            <p:cNvSpPr txBox="1"/>
+            <p:nvPr/>
+          </p:nvSpPr>
+          <p:spPr>
+            <a:xfrm>
+              <a:off x="720000" y="6480000"/>
+              <a:ext cx="2880000" cy="720000"/>
+            </a:xfrm>
+            <a:prstGeom prst="rect">
+              <a:avLst/>
+            </a:prstGeom>
+            <a:solidFill>
+              <a:schemeClr val="accent1"/>
+            </a:solidFill>
+            <a:ln w="38160">
+              <a:solidFill>
+                <a:schemeClr val="accent1">
+                  <a:lumMod val="75000"/>
+                  <a:lumOff val="0"/>
+                </a:schemeClr>
+              </a:solidFill>
+              <a:round/>
+            </a:ln>
+          </p:spPr>
+          <p:txBody>
+            <a:bodyPr lIns="90000" tIns="45000" rIns="90000" bIns="45000" anchor="t">
+              <a:spAutoFit/>
+            </a:bodyPr>
+            <a:p>
+              <a:pPr/>
+              <a:r>
+                <a:rPr lang="en-US" sz="1800" b="0" u="none" strike="noStrike">
+                  <a:solidFill>
+                    <a:srgbClr val="FFFFFF"/>
+                  </a:solidFill>
+                  <a:effectLst/>
+                  <a:uFillTx/>
+                  <a:latin typeface="Arial"/>
+                </a:rPr>
+                <a:t>Inside a group shape.</a:t>
+              </a:r>
+              <a:endParaRPr lang="en-US" sz="1800" b="0" u="none" strike="noStrike">
+                <a:solidFill>
+                  <a:srgbClr val="FFFFFF"/>
+                </a:solidFill>
+                <a:effectLst/>
+                <a:uFillTx/>
+                <a:latin typeface="Arial"/>
+              </a:endParaRPr>
+            </a:p>
+          </p:txBody>
+        </p:sp>
+      </p:grpSp>
+    </p:spTree>
+  </p:cSld>
+  <mc:AlternateContent>
+    <mc:Choice Requires="p14">
+      <p:transition spd="slow" p14:dur="2000"/>
+    </mc:Choice>
+    <mc:Fallback>
+      <p:transition spd="slow"/>
+    </mc:Fallback>
+  </mc:AlternateContent>
+</p:sld>
+</file>
+
+<file path=ppt/slides/slide9.xml><?xml version="1.0" encoding="utf-8"?>
+<p:sld xmlns:a="http://schemas.openxmlformats.org/drawingml/2006/main" xmlns:p="http://schemas.openxmlformats.org/presentationml/2006/main" xmlns:r="http://schemas.openxmlformats.org/officeDocument/2006/relationships" xmlns:p14="http://schemas.microsoft.com/office/powerpoint/2010/main" xmlns:p15="http://schemas.microsoft.com/office/powerpoint/2012/main" xmlns:mc="http://schemas.openxmlformats.org/markup-compatibility/2006">
+  <p:cSld>
+    <p:spTree>
+      <p:nvGrpSpPr>
+        <p:cNvPr id="1" name=""/>
+        <p:cNvGrpSpPr/>
+        <p:nvPr/>
+      </p:nvGrpSpPr>
+      <p:grpSpPr>
+        <a:xfrm>
+          <a:off x="0" y="0"/>
+          <a:ext cx="0" cy="0"/>
+          <a:chOff x="0" y="0"/>
+          <a:chExt cx="0" cy="0"/>
+        </a:xfrm>
+      </p:grpSpPr>
+      <p:sp>
+        <p:nvSpPr>
+          <p:cNvPr id="43" name=""/>
+          <p:cNvSpPr txBox="1"/>
+          <p:nvPr/>
+        </p:nvSpPr>
+        <p:spPr>
+          <a:xfrm>
+            <a:off x="720000" y="360000"/>
+            <a:ext cx="8640000" cy="1080000"/>
+          </a:xfrm>
+          <a:prstGeom prst="rect">
+            <a:avLst/>
+          </a:prstGeom>
+          <a:solidFill>
+            <a:schemeClr val="accent1"/>
+          </a:solidFill>
+          <a:ln w="38160">
+            <a:solidFill>
+              <a:schemeClr val="accent1">
+                <a:lumMod val="75000"/>
+                <a:lumOff val="0"/>
+              </a:schemeClr>
+            </a:solidFill>
+            <a:round/>
+          </a:ln>
+        </p:spPr>
+        <p:txBody>
+          <a:bodyPr lIns="90000" tIns="45000" rIns="90000" bIns="45000" anchor="t">
+            <a:spAutoFit/>
+          </a:bodyPr>
+          <a:p>
+            <a:pPr/>
+            <a:r>
+              <a:rPr lang="en-US" sz="1800" b="0" u="none" strike="noStrike">
+                <a:solidFill>
+                  <a:srgbClr val="FFFFFF"/>
+                </a:solidFill>
+                <a:effectLst/>
+                <a:uFillTx/>
+                <a:latin typeface="Arial"/>
+              </a:rPr>
+              <a:t>Slide 9: Release</a:t>
+            </a:r>
+            <a:endParaRPr lang="en-US" sz="1800" b="0" u="none" strike="noStrike">
+              <a:solidFill>
+                <a:srgbClr val="FFFFFF"/>
+              </a:solidFill>
+              <a:effectLst/>
+              <a:uFillTx/>
+              <a:latin typeface="Arial"/>
+            </a:endParaRPr>
+          </a:p>
+        </p:txBody>
+      </p:sp>
+      <p:sp>
+        <p:nvSpPr>
+          <p:cNvPr id="44" name=""/>
+          <p:cNvSpPr txBox="1"/>
+          <p:nvPr/>
+        </p:nvSpPr>
+        <p:spPr>
+          <a:xfrm>
+            <a:off x="720000" y="1800000"/>
+            <a:ext cx="8640000" cy="5040000"/>
+          </a:xfrm>
+          <a:prstGeom prst="rect">
+            <a:avLst/>
+          </a:prstGeom>
+          <a:solidFill>
+            <a:schemeClr val="accent1"/>
+          </a:solidFill>
+          <a:ln w="38160">
+            <a:solidFill>
+              <a:schemeClr val="accent1">
+                <a:lumMod val="75000"/>
+                <a:lumOff val="0"/>
+              </a:schemeClr>
+            </a:solidFill>
+            <a:round/>
+          </a:ln>
+        </p:spPr>
+        <p:txBody>
+          <a:bodyPr lIns="90000" tIns="45000" rIns="90000" bIns="45000" anchor="t">
+            <a:spAutoFit/>
+          </a:bodyPr>
+          <a:p>
+            <a:pPr marL="216000" indent="-216000">
+              <a:buClr>
+                <a:srgbClr val="000000"/>
+              </a:buClr>
+              <a:buSzPct val="45000"/>
+              <a:buFont typeface="starbats" charset="2"/>
+              <a:buChar char=""/>
+            </a:pPr>
+            <a:r>
+              <a:rPr lang="en-US" sz="1800" b="0" u="none" strike="noStrike">
+                <a:solidFill>
+                  <a:srgbClr val="FFFFFF"/>
+                </a:solidFill>
+                <a:effectLst/>
+                <a:uFillTx/>
+                <a:latin typeface="Arial"/>
+              </a:rPr>
+              <a:t>Top level point</a:t>
+            </a:r>
+            <a:endParaRPr lang="en-US" sz="1800" b="0" u="none" strike="noStrike">
+              <a:solidFill>
+                <a:srgbClr val="FFFFFF"/>
+              </a:solidFill>
+              <a:effectLst/>
+              <a:uFillTx/>
+              <a:latin typeface="Arial"/>
+            </a:endParaRPr>
+          </a:p>
+          <a:p>
+            <a:pPr marL="432000" lvl="1" indent="-216000">
+              <a:buClr>
+                <a:srgbClr val="000000"/>
+              </a:buClr>
+              <a:buSzPct val="45000"/>
+              <a:buFont typeface="starbats" charset="2"/>
+              <a:buChar char=""/>
+            </a:pPr>
+            <a:r>
+              <a:rPr lang="en-US" sz="1800" b="0" u="none" strike="noStrike">
+                <a:solidFill>
+                  <a:srgbClr val="FFFFFF"/>
+                </a:solidFill>
+                <a:effectLst/>
+                <a:uFillTx/>
+                <a:latin typeface="Arial"/>
+              </a:rPr>
+              <a:t>Nested detail</a:t>
+            </a:r>
+            <a:endParaRPr lang="en-US" sz="1800" b="0" u="none" strike="noStrike">
+              <a:solidFill>
+                <a:srgbClr val="FFFFFF"/>
+              </a:solidFill>
+              <a:effectLst/>
+              <a:uFillTx/>
+              <a:latin typeface="Arial"/>
+            </a:endParaRPr>
+          </a:p>
+          <a:p>
+            <a:pPr marL="216000" indent="-216000">
+              <a:buClr>
+                <a:srgbClr val="000000"/>
+              </a:buClr>
+              <a:buSzPct val="45000"/>
+              <a:buFont typeface="starbats" charset="2"/>
+              <a:buChar char=""/>
+            </a:pPr>
+            <a:r>
+              <a:rPr lang="en-US" sz="1800" b="0" u="none" strike="noStrike">
+                <a:solidFill>
+                  <a:srgbClr val="FFFFFF"/>
+                </a:solidFill>
+                <a:effectLst/>
+                <a:uFillTx/>
+                <a:latin typeface="Arial"/>
+              </a:rPr>
+              <a:t>Second point with emphasis</a:t>
+            </a:r>
+            <a:endParaRPr lang="en-US" sz="1800" b="0" u="none" strike="noStrike">
+              <a:solidFill>
+                <a:srgbClr val="FFFFFF"/>
+              </a:solidFill>
+              <a:effectLst/>
+              <a:uFillTx/>
+              <a:latin typeface="Arial"/>
+            </a:endParaRPr>
+          </a:p>
+        </p:txBody>
+      </p:sp>
     </p:spTree>
   </p:cSld>
   <mc:AlternateContent>
@@ -1924,37 +5234,37 @@
         <a:srgbClr val="000000"/>
       </a:dk1>
       <a:lt1>
-        <a:srgbClr val="ffffff"/>
+        <a:srgbClr val="FFFFFF"/>
       </a:lt1>
       <a:dk2>
         <a:srgbClr val="000000"/>
       </a:dk2>
       <a:lt2>
-        <a:srgbClr val="ffffff"/>
+        <a:srgbClr val="FFFFFF"/>
       </a:lt2>
       <a:accent1>
-        <a:srgbClr val="18a303"/>
+        <a:srgbClr val="18A303"/>
       </a:accent1>
       <a:accent2>
-        <a:srgbClr val="0369a3"/>
+        <a:srgbClr val="0369A3"/>
       </a:accent2>
       <a:accent3>
-        <a:srgbClr val="a33e03"/>
+        <a:srgbClr val="A33E03"/>
       </a:accent3>
       <a:accent4>
-        <a:srgbClr val="8e03a3"/>
+        <a:srgbClr val="8E03A3"/>
       </a:accent4>
       <a:accent5>
-        <a:srgbClr val="c99c00"/>
+        <a:srgbClr val="C99C00"/>
       </a:accent5>
       <a:accent6>
-        <a:srgbClr val="c9211e"/>
+        <a:srgbClr val="C9211E"/>
       </a:accent6>
       <a:hlink>
-        <a:srgbClr val="0000ee"/>
+        <a:srgbClr val="0000EE"/>
       </a:hlink>
       <a:folHlink>
-        <a:srgbClr val="551a8b"/>
+        <a:srgbClr val="551A8B"/>
       </a:folHlink>
     </a:clrScheme>
     <a:fontScheme name="Office">
@@ -2030,37 +5340,37 @@
         <a:srgbClr val="000000"/>
       </a:dk1>
       <a:lt1>
-        <a:srgbClr val="ffffff"/>
+        <a:srgbClr val="FFFFFF"/>
       </a:lt1>
       <a:dk2>
         <a:srgbClr val="000000"/>
       </a:dk2>
       <a:lt2>
-        <a:srgbClr val="ffffff"/>
+        <a:srgbClr val="FFFFFF"/>
       </a:lt2>
       <a:accent1>
-        <a:srgbClr val="18a303"/>
+        <a:srgbClr val="18A303"/>
       </a:accent1>
       <a:accent2>
-        <a:srgbClr val="0369a3"/>
+        <a:srgbClr val="0369A3"/>
       </a:accent2>
       <a:accent3>
-        <a:srgbClr val="a33e03"/>
+        <a:srgbClr val="A33E03"/>
       </a:accent3>
       <a:accent4>
-        <a:srgbClr val="8e03a3"/>
+        <a:srgbClr val="8E03A3"/>
       </a:accent4>
       <a:accent5>
-        <a:srgbClr val="c99c00"/>
+        <a:srgbClr val="C99C00"/>
       </a:accent5>
       <a:accent6>
-        <a:srgbClr val="c9211e"/>
+        <a:srgbClr val="C9211E"/>
       </a:accent6>
       <a:hlink>
-        <a:srgbClr val="0000ee"/>
+        <a:srgbClr val="0000EE"/>
       </a:hlink>
       <a:folHlink>
-        <a:srgbClr val="551a8b"/>
+        <a:srgbClr val="551A8B"/>
       </a:folHlink>
     </a:clrScheme>
     <a:fontScheme name="Office">
